--- a/assets/ATMOS_AI_Presentation.pptx
+++ b/assets/ATMOS_AI_Presentation.pptx
@@ -1,22 +1,23 @@
 
 <file path=ppt/presentation.xml><?xml version="1.0" encoding="utf-8"?>
-<p:presentation xmlns:a="http://schemas.openxmlformats.org/drawingml/2006/main" xmlns:r="http://schemas.openxmlformats.org/officeDocument/2006/relationships" xmlns:p="http://schemas.openxmlformats.org/presentationml/2006/main" saveSubsetFonts="1" autoCompressPictures="0">
+<p:presentation xmlns:a="http://schemas.openxmlformats.org/drawingml/2006/main" xmlns:r="http://schemas.openxmlformats.org/officeDocument/2006/relationships" xmlns:p="http://schemas.openxmlformats.org/presentationml/2006/main" autoCompressPictures="0">
   <p:sldMasterIdLst>
     <p:sldMasterId id="2147483648" r:id="rId1"/>
   </p:sldMasterIdLst>
   <p:sldIdLst>
-    <p:sldId id="256" r:id="rId7"/>
-    <p:sldId id="257" r:id="rId8"/>
-    <p:sldId id="258" r:id="rId9"/>
-    <p:sldId id="259" r:id="rId10"/>
-    <p:sldId id="260" r:id="rId11"/>
-    <p:sldId id="261" r:id="rId12"/>
-    <p:sldId id="262" r:id="rId13"/>
-    <p:sldId id="263" r:id="rId14"/>
-    <p:sldId id="264" r:id="rId15"/>
-    <p:sldId id="265" r:id="rId16"/>
+    <p:sldId id="266" r:id="rId3"/>
+    <p:sldId id="256" r:id="rId4"/>
+    <p:sldId id="257" r:id="rId5"/>
+    <p:sldId id="258" r:id="rId6"/>
+    <p:sldId id="259" r:id="rId7"/>
+    <p:sldId id="260" r:id="rId8"/>
+    <p:sldId id="261" r:id="rId9"/>
+    <p:sldId id="262" r:id="rId10"/>
+    <p:sldId id="263" r:id="rId11"/>
+    <p:sldId id="264" r:id="rId12"/>
+    <p:sldId id="265" r:id="rId13"/>
   </p:sldIdLst>
-  <p:sldSz cx="12191695" cy="6858000" type="screen4x3"/>
+  <p:sldSz cx="12191365" cy="6858000" type="screen4x3"/>
   <p:notesSz cx="6858000" cy="9144000"/>
   <p:defaultTextStyle>
     <a:defPPr>
@@ -113,6 +114,22 @@
       </a:defRPr>
     </a:lvl9pPr>
   </p:defaultTextStyle>
+  <p:extLst>
+    <p:ext uri="{EFAFB233-063F-42B5-8137-9DF3F51BA10A}">
+      <p15:sldGuideLst xmlns:p15="http://schemas.microsoft.com/office/powerpoint/2012/main">
+        <p15:guide id="1" orient="horz" pos="2160" userDrawn="1">
+          <p15:clr>
+            <a:srgbClr val="A4A3A4"/>
+          </p15:clr>
+        </p15:guide>
+        <p15:guide id="2" pos="2880" userDrawn="1">
+          <p15:clr>
+            <a:srgbClr val="A4A3A4"/>
+          </p15:clr>
+        </p15:guide>
+      </p15:sldGuideLst>
+    </p:ext>
+  </p:extLst>
 </p:presentation>
 </file>
 
@@ -297,7 +314,6 @@
           <a:p>
             <a:fld id="{5BCAD085-E8A6-8845-BD4E-CB4CCA059FC4}" type="datetimeFigureOut">
               <a:rPr lang="en-US" smtClean="0"/>
-              <a:t>1/27/13</a:t>
             </a:fld>
             <a:endParaRPr lang="en-US"/>
           </a:p>
@@ -339,18 +355,12 @@
           <a:p>
             <a:fld id="{C1FF6DA9-008F-8B48-92A6-B652298478BF}" type="slidenum">
               <a:rPr lang="en-US" smtClean="0"/>
-              <a:t>‹#›</a:t>
             </a:fld>
             <a:endParaRPr lang="en-US"/>
           </a:p>
         </p:txBody>
       </p:sp>
     </p:spTree>
-    <p:extLst>
-      <p:ext uri="{BB962C8B-B14F-4D97-AF65-F5344CB8AC3E}">
-        <p14:creationId xmlns:p14="http://schemas.microsoft.com/office/powerpoint/2010/main" val="3168075583"/>
-      </p:ext>
-    </p:extLst>
   </p:cSld>
   <p:clrMapOvr>
     <a:masterClrMapping/>
@@ -418,6 +428,7 @@
               <a:rPr lang="en-US" smtClean="0"/>
               <a:t>Click to edit Master text styles</a:t>
             </a:r>
+            <a:endParaRPr lang="en-US" smtClean="0"/>
           </a:p>
           <a:p>
             <a:pPr lvl="1"/>
@@ -425,6 +436,7 @@
               <a:rPr lang="en-US" smtClean="0"/>
               <a:t>Second level</a:t>
             </a:r>
+            <a:endParaRPr lang="en-US" smtClean="0"/>
           </a:p>
           <a:p>
             <a:pPr lvl="2"/>
@@ -432,6 +444,7 @@
               <a:rPr lang="en-US" smtClean="0"/>
               <a:t>Third level</a:t>
             </a:r>
+            <a:endParaRPr lang="en-US" smtClean="0"/>
           </a:p>
           <a:p>
             <a:pPr lvl="3"/>
@@ -439,6 +452,7 @@
               <a:rPr lang="en-US" smtClean="0"/>
               <a:t>Fourth level</a:t>
             </a:r>
+            <a:endParaRPr lang="en-US" smtClean="0"/>
           </a:p>
           <a:p>
             <a:pPr lvl="4"/>
@@ -467,7 +481,6 @@
           <a:p>
             <a:fld id="{5BCAD085-E8A6-8845-BD4E-CB4CCA059FC4}" type="datetimeFigureOut">
               <a:rPr lang="en-US" smtClean="0"/>
-              <a:t>1/27/13</a:t>
             </a:fld>
             <a:endParaRPr lang="en-US"/>
           </a:p>
@@ -509,18 +522,12 @@
           <a:p>
             <a:fld id="{C1FF6DA9-008F-8B48-92A6-B652298478BF}" type="slidenum">
               <a:rPr lang="en-US" smtClean="0"/>
-              <a:t>‹#›</a:t>
             </a:fld>
             <a:endParaRPr lang="en-US"/>
           </a:p>
         </p:txBody>
       </p:sp>
     </p:spTree>
-    <p:extLst>
-      <p:ext uri="{BB962C8B-B14F-4D97-AF65-F5344CB8AC3E}">
-        <p14:creationId xmlns:p14="http://schemas.microsoft.com/office/powerpoint/2010/main" val="2910927964"/>
-      </p:ext>
-    </p:extLst>
   </p:cSld>
   <p:clrMapOvr>
     <a:masterClrMapping/>
@@ -598,6 +605,7 @@
               <a:rPr lang="en-US" smtClean="0"/>
               <a:t>Click to edit Master text styles</a:t>
             </a:r>
+            <a:endParaRPr lang="en-US" smtClean="0"/>
           </a:p>
           <a:p>
             <a:pPr lvl="1"/>
@@ -605,6 +613,7 @@
               <a:rPr lang="en-US" smtClean="0"/>
               <a:t>Second level</a:t>
             </a:r>
+            <a:endParaRPr lang="en-US" smtClean="0"/>
           </a:p>
           <a:p>
             <a:pPr lvl="2"/>
@@ -612,6 +621,7 @@
               <a:rPr lang="en-US" smtClean="0"/>
               <a:t>Third level</a:t>
             </a:r>
+            <a:endParaRPr lang="en-US" smtClean="0"/>
           </a:p>
           <a:p>
             <a:pPr lvl="3"/>
@@ -619,6 +629,7 @@
               <a:rPr lang="en-US" smtClean="0"/>
               <a:t>Fourth level</a:t>
             </a:r>
+            <a:endParaRPr lang="en-US" smtClean="0"/>
           </a:p>
           <a:p>
             <a:pPr lvl="4"/>
@@ -647,7 +658,6 @@
           <a:p>
             <a:fld id="{5BCAD085-E8A6-8845-BD4E-CB4CCA059FC4}" type="datetimeFigureOut">
               <a:rPr lang="en-US" smtClean="0"/>
-              <a:t>1/27/13</a:t>
             </a:fld>
             <a:endParaRPr lang="en-US"/>
           </a:p>
@@ -689,18 +699,174 @@
           <a:p>
             <a:fld id="{C1FF6DA9-008F-8B48-92A6-B652298478BF}" type="slidenum">
               <a:rPr lang="en-US" smtClean="0"/>
-              <a:t>‹#›</a:t>
             </a:fld>
             <a:endParaRPr lang="en-US"/>
           </a:p>
         </p:txBody>
       </p:sp>
     </p:spTree>
-    <p:extLst>
-      <p:ext uri="{BB962C8B-B14F-4D97-AF65-F5344CB8AC3E}">
-        <p14:creationId xmlns:p14="http://schemas.microsoft.com/office/powerpoint/2010/main" val="3612223792"/>
-      </p:ext>
-    </p:extLst>
+  </p:cSld>
+  <p:clrMapOvr>
+    <a:masterClrMapping/>
+  </p:clrMapOvr>
+</p:sldLayout>
+</file>
+
+<file path=ppt/slideLayouts/slideLayout12.xml><?xml version="1.0" encoding="utf-8"?>
+<p:sldLayout xmlns:a="http://schemas.openxmlformats.org/drawingml/2006/main" xmlns:r="http://schemas.openxmlformats.org/officeDocument/2006/relationships" xmlns:p="http://schemas.openxmlformats.org/presentationml/2006/main" preserve="1" userDrawn="1">
+  <p:cSld name="仅标题">
+    <p:spTree>
+      <p:nvGrpSpPr>
+        <p:cNvPr id="1" name=""/>
+        <p:cNvGrpSpPr/>
+        <p:nvPr/>
+      </p:nvGrpSpPr>
+      <p:grpSpPr>
+        <a:xfrm>
+          <a:off x="0" y="0"/>
+          <a:ext cx="0" cy="0"/>
+          <a:chOff x="0" y="0"/>
+          <a:chExt cx="0" cy="0"/>
+        </a:xfrm>
+      </p:grpSpPr>
+      <p:sp>
+        <p:nvSpPr>
+          <p:cNvPr id="2" name="标题 1"/>
+          <p:cNvSpPr>
+            <a:spLocks noGrp="1"/>
+          </p:cNvSpPr>
+          <p:nvPr>
+            <p:ph type="title" hasCustomPrompt="1"/>
+            <p:custDataLst>
+              <p:tags r:id="rId2"/>
+            </p:custDataLst>
+          </p:nvPr>
+        </p:nvSpPr>
+        <p:spPr>
+          <a:xfrm>
+            <a:off x="695964" y="394563"/>
+            <a:ext cx="10799438" cy="791959"/>
+          </a:xfrm>
+        </p:spPr>
+        <p:txBody>
+          <a:bodyPr lIns="0" tIns="0" rIns="0" bIns="0" anchor="ctr"/>
+          <a:lstStyle>
+            <a:lvl1pPr algn="ctr" fontAlgn="base">
+              <a:defRPr sz="3200">
+                <a:solidFill>
+                  <a:schemeClr val="tx1">
+                    <a:lumMod val="85000"/>
+                    <a:lumOff val="15000"/>
+                  </a:schemeClr>
+                </a:solidFill>
+                <a:latin typeface="+mj-lt"/>
+              </a:defRPr>
+            </a:lvl1pPr>
+          </a:lstStyle>
+          <a:p>
+            <a:r>
+              <a:rPr lang="en-US" dirty="0"/>
+              <a:t>Click to add title</a:t>
+            </a:r>
+            <a:endParaRPr lang="en-US" dirty="0"/>
+          </a:p>
+        </p:txBody>
+      </p:sp>
+      <p:sp>
+        <p:nvSpPr>
+          <p:cNvPr id="3" name="日期占位符 2"/>
+          <p:cNvSpPr>
+            <a:spLocks noGrp="1"/>
+          </p:cNvSpPr>
+          <p:nvPr>
+            <p:ph type="dt" sz="half" idx="10"/>
+            <p:custDataLst>
+              <p:tags r:id="rId3"/>
+            </p:custDataLst>
+          </p:nvPr>
+        </p:nvSpPr>
+        <p:spPr/>
+        <p:txBody>
+          <a:bodyPr/>
+          <a:lstStyle>
+            <a:lvl1pPr>
+              <a:defRPr>
+                <a:latin typeface="Arial" panose="020B0604020202020204" pitchFamily="34" charset="0"/>
+                <a:sym typeface="Arial" panose="020B0604020202020204" pitchFamily="34" charset="0"/>
+              </a:defRPr>
+            </a:lvl1pPr>
+          </a:lstStyle>
+          <a:p>
+            <a:r>
+              <a:rPr lang="en-US"/>
+              <a:t>Date Area</a:t>
+            </a:r>
+            <a:endParaRPr lang="en-US"/>
+          </a:p>
+        </p:txBody>
+      </p:sp>
+      <p:sp>
+        <p:nvSpPr>
+          <p:cNvPr id="4" name="页脚占位符 3"/>
+          <p:cNvSpPr>
+            <a:spLocks noGrp="1"/>
+          </p:cNvSpPr>
+          <p:nvPr>
+            <p:ph type="ftr" sz="quarter" idx="11"/>
+            <p:custDataLst>
+              <p:tags r:id="rId4"/>
+            </p:custDataLst>
+          </p:nvPr>
+        </p:nvSpPr>
+        <p:spPr/>
+        <p:txBody>
+          <a:bodyPr/>
+          <a:lstStyle>
+            <a:lvl1pPr>
+              <a:defRPr>
+                <a:latin typeface="Arial" panose="020B0604020202020204" pitchFamily="34" charset="0"/>
+                <a:sym typeface="Arial" panose="020B0604020202020204" pitchFamily="34" charset="0"/>
+              </a:defRPr>
+            </a:lvl1pPr>
+          </a:lstStyle>
+          <a:p>
+            <a:endParaRPr lang="en-US" dirty="0"/>
+          </a:p>
+        </p:txBody>
+      </p:sp>
+      <p:sp>
+        <p:nvSpPr>
+          <p:cNvPr id="5" name="灯片编号占位符 4"/>
+          <p:cNvSpPr>
+            <a:spLocks noGrp="1"/>
+          </p:cNvSpPr>
+          <p:nvPr>
+            <p:ph type="sldNum" sz="quarter" idx="12"/>
+            <p:custDataLst>
+              <p:tags r:id="rId5"/>
+            </p:custDataLst>
+          </p:nvPr>
+        </p:nvSpPr>
+        <p:spPr/>
+        <p:txBody>
+          <a:bodyPr/>
+          <a:lstStyle>
+            <a:lvl1pPr>
+              <a:defRPr>
+                <a:latin typeface="Arial" panose="020B0604020202020204" pitchFamily="34" charset="0"/>
+                <a:sym typeface="Arial" panose="020B0604020202020204" pitchFamily="34" charset="0"/>
+              </a:defRPr>
+            </a:lvl1pPr>
+          </a:lstStyle>
+          <a:p>
+            <a:fld id="{49AE70B2-8BF9-45C0-BB95-33D1B9D3A854}" type="slidenum">
+              <a:rPr lang="en-US" smtClean="0"/>
+            </a:fld>
+            <a:endParaRPr lang="en-US" dirty="0"/>
+          </a:p>
+        </p:txBody>
+      </p:sp>
+    </p:spTree>
   </p:cSld>
   <p:clrMapOvr>
     <a:masterClrMapping/>
@@ -768,6 +934,7 @@
               <a:rPr lang="en-US" smtClean="0"/>
               <a:t>Click to edit Master text styles</a:t>
             </a:r>
+            <a:endParaRPr lang="en-US" smtClean="0"/>
           </a:p>
           <a:p>
             <a:pPr lvl="1"/>
@@ -775,6 +942,7 @@
               <a:rPr lang="en-US" smtClean="0"/>
               <a:t>Second level</a:t>
             </a:r>
+            <a:endParaRPr lang="en-US" smtClean="0"/>
           </a:p>
           <a:p>
             <a:pPr lvl="2"/>
@@ -782,6 +950,7 @@
               <a:rPr lang="en-US" smtClean="0"/>
               <a:t>Third level</a:t>
             </a:r>
+            <a:endParaRPr lang="en-US" smtClean="0"/>
           </a:p>
           <a:p>
             <a:pPr lvl="3"/>
@@ -789,6 +958,7 @@
               <a:rPr lang="en-US" smtClean="0"/>
               <a:t>Fourth level</a:t>
             </a:r>
+            <a:endParaRPr lang="en-US" smtClean="0"/>
           </a:p>
           <a:p>
             <a:pPr lvl="4"/>
@@ -817,7 +987,6 @@
           <a:p>
             <a:fld id="{5BCAD085-E8A6-8845-BD4E-CB4CCA059FC4}" type="datetimeFigureOut">
               <a:rPr lang="en-US" smtClean="0"/>
-              <a:t>1/27/13</a:t>
             </a:fld>
             <a:endParaRPr lang="en-US"/>
           </a:p>
@@ -859,18 +1028,12 @@
           <a:p>
             <a:fld id="{C1FF6DA9-008F-8B48-92A6-B652298478BF}" type="slidenum">
               <a:rPr lang="en-US" smtClean="0"/>
-              <a:t>‹#›</a:t>
             </a:fld>
             <a:endParaRPr lang="en-US"/>
           </a:p>
         </p:txBody>
       </p:sp>
     </p:spTree>
-    <p:extLst>
-      <p:ext uri="{BB962C8B-B14F-4D97-AF65-F5344CB8AC3E}">
-        <p14:creationId xmlns:p14="http://schemas.microsoft.com/office/powerpoint/2010/main" val="2614314258"/>
-      </p:ext>
-    </p:extLst>
   </p:cSld>
   <p:clrMapOvr>
     <a:masterClrMapping/>
@@ -1043,6 +1206,7 @@
               <a:rPr lang="en-US" smtClean="0"/>
               <a:t>Click to edit Master text styles</a:t>
             </a:r>
+            <a:endParaRPr lang="en-US" smtClean="0"/>
           </a:p>
         </p:txBody>
       </p:sp>
@@ -1063,7 +1227,6 @@
           <a:p>
             <a:fld id="{5BCAD085-E8A6-8845-BD4E-CB4CCA059FC4}" type="datetimeFigureOut">
               <a:rPr lang="en-US" smtClean="0"/>
-              <a:t>1/27/13</a:t>
             </a:fld>
             <a:endParaRPr lang="en-US"/>
           </a:p>
@@ -1105,18 +1268,12 @@
           <a:p>
             <a:fld id="{C1FF6DA9-008F-8B48-92A6-B652298478BF}" type="slidenum">
               <a:rPr lang="en-US" smtClean="0"/>
-              <a:t>‹#›</a:t>
             </a:fld>
             <a:endParaRPr lang="en-US"/>
           </a:p>
         </p:txBody>
       </p:sp>
     </p:spTree>
-    <p:extLst>
-      <p:ext uri="{BB962C8B-B14F-4D97-AF65-F5344CB8AC3E}">
-        <p14:creationId xmlns:p14="http://schemas.microsoft.com/office/powerpoint/2010/main" val="960648375"/>
-      </p:ext>
-    </p:extLst>
   </p:cSld>
   <p:clrMapOvr>
     <a:masterClrMapping/>
@@ -1217,6 +1374,7 @@
               <a:rPr lang="en-US" smtClean="0"/>
               <a:t>Click to edit Master text styles</a:t>
             </a:r>
+            <a:endParaRPr lang="en-US" smtClean="0"/>
           </a:p>
           <a:p>
             <a:pPr lvl="1"/>
@@ -1224,6 +1382,7 @@
               <a:rPr lang="en-US" smtClean="0"/>
               <a:t>Second level</a:t>
             </a:r>
+            <a:endParaRPr lang="en-US" smtClean="0"/>
           </a:p>
           <a:p>
             <a:pPr lvl="2"/>
@@ -1231,6 +1390,7 @@
               <a:rPr lang="en-US" smtClean="0"/>
               <a:t>Third level</a:t>
             </a:r>
+            <a:endParaRPr lang="en-US" smtClean="0"/>
           </a:p>
           <a:p>
             <a:pPr lvl="3"/>
@@ -1238,6 +1398,7 @@
               <a:rPr lang="en-US" smtClean="0"/>
               <a:t>Fourth level</a:t>
             </a:r>
+            <a:endParaRPr lang="en-US" smtClean="0"/>
           </a:p>
           <a:p>
             <a:pPr lvl="4"/>
@@ -1302,6 +1463,7 @@
               <a:rPr lang="en-US" smtClean="0"/>
               <a:t>Click to edit Master text styles</a:t>
             </a:r>
+            <a:endParaRPr lang="en-US" smtClean="0"/>
           </a:p>
           <a:p>
             <a:pPr lvl="1"/>
@@ -1309,6 +1471,7 @@
               <a:rPr lang="en-US" smtClean="0"/>
               <a:t>Second level</a:t>
             </a:r>
+            <a:endParaRPr lang="en-US" smtClean="0"/>
           </a:p>
           <a:p>
             <a:pPr lvl="2"/>
@@ -1316,6 +1479,7 @@
               <a:rPr lang="en-US" smtClean="0"/>
               <a:t>Third level</a:t>
             </a:r>
+            <a:endParaRPr lang="en-US" smtClean="0"/>
           </a:p>
           <a:p>
             <a:pPr lvl="3"/>
@@ -1323,6 +1487,7 @@
               <a:rPr lang="en-US" smtClean="0"/>
               <a:t>Fourth level</a:t>
             </a:r>
+            <a:endParaRPr lang="en-US" smtClean="0"/>
           </a:p>
           <a:p>
             <a:pPr lvl="4"/>
@@ -1351,7 +1516,6 @@
           <a:p>
             <a:fld id="{5BCAD085-E8A6-8845-BD4E-CB4CCA059FC4}" type="datetimeFigureOut">
               <a:rPr lang="en-US" smtClean="0"/>
-              <a:t>1/27/13</a:t>
             </a:fld>
             <a:endParaRPr lang="en-US"/>
           </a:p>
@@ -1393,18 +1557,12 @@
           <a:p>
             <a:fld id="{C1FF6DA9-008F-8B48-92A6-B652298478BF}" type="slidenum">
               <a:rPr lang="en-US" smtClean="0"/>
-              <a:t>‹#›</a:t>
             </a:fld>
             <a:endParaRPr lang="en-US"/>
           </a:p>
         </p:txBody>
       </p:sp>
     </p:spTree>
-    <p:extLst>
-      <p:ext uri="{BB962C8B-B14F-4D97-AF65-F5344CB8AC3E}">
-        <p14:creationId xmlns:p14="http://schemas.microsoft.com/office/powerpoint/2010/main" val="2782244947"/>
-      </p:ext>
-    </p:extLst>
   </p:cSld>
   <p:clrMapOvr>
     <a:masterClrMapping/>
@@ -1518,6 +1676,7 @@
               <a:rPr lang="en-US" smtClean="0"/>
               <a:t>Click to edit Master text styles</a:t>
             </a:r>
+            <a:endParaRPr lang="en-US" smtClean="0"/>
           </a:p>
         </p:txBody>
       </p:sp>
@@ -1574,6 +1733,7 @@
               <a:rPr lang="en-US" smtClean="0"/>
               <a:t>Click to edit Master text styles</a:t>
             </a:r>
+            <a:endParaRPr lang="en-US" smtClean="0"/>
           </a:p>
           <a:p>
             <a:pPr lvl="1"/>
@@ -1581,6 +1741,7 @@
               <a:rPr lang="en-US" smtClean="0"/>
               <a:t>Second level</a:t>
             </a:r>
+            <a:endParaRPr lang="en-US" smtClean="0"/>
           </a:p>
           <a:p>
             <a:pPr lvl="2"/>
@@ -1588,6 +1749,7 @@
               <a:rPr lang="en-US" smtClean="0"/>
               <a:t>Third level</a:t>
             </a:r>
+            <a:endParaRPr lang="en-US" smtClean="0"/>
           </a:p>
           <a:p>
             <a:pPr lvl="3"/>
@@ -1595,6 +1757,7 @@
               <a:rPr lang="en-US" smtClean="0"/>
               <a:t>Fourth level</a:t>
             </a:r>
+            <a:endParaRPr lang="en-US" smtClean="0"/>
           </a:p>
           <a:p>
             <a:pPr lvl="4"/>
@@ -1668,6 +1831,7 @@
               <a:rPr lang="en-US" smtClean="0"/>
               <a:t>Click to edit Master text styles</a:t>
             </a:r>
+            <a:endParaRPr lang="en-US" smtClean="0"/>
           </a:p>
         </p:txBody>
       </p:sp>
@@ -1724,6 +1888,7 @@
               <a:rPr lang="en-US" smtClean="0"/>
               <a:t>Click to edit Master text styles</a:t>
             </a:r>
+            <a:endParaRPr lang="en-US" smtClean="0"/>
           </a:p>
           <a:p>
             <a:pPr lvl="1"/>
@@ -1731,6 +1896,7 @@
               <a:rPr lang="en-US" smtClean="0"/>
               <a:t>Second level</a:t>
             </a:r>
+            <a:endParaRPr lang="en-US" smtClean="0"/>
           </a:p>
           <a:p>
             <a:pPr lvl="2"/>
@@ -1738,6 +1904,7 @@
               <a:rPr lang="en-US" smtClean="0"/>
               <a:t>Third level</a:t>
             </a:r>
+            <a:endParaRPr lang="en-US" smtClean="0"/>
           </a:p>
           <a:p>
             <a:pPr lvl="3"/>
@@ -1745,6 +1912,7 @@
               <a:rPr lang="en-US" smtClean="0"/>
               <a:t>Fourth level</a:t>
             </a:r>
+            <a:endParaRPr lang="en-US" smtClean="0"/>
           </a:p>
           <a:p>
             <a:pPr lvl="4"/>
@@ -1773,7 +1941,6 @@
           <a:p>
             <a:fld id="{5BCAD085-E8A6-8845-BD4E-CB4CCA059FC4}" type="datetimeFigureOut">
               <a:rPr lang="en-US" smtClean="0"/>
-              <a:t>1/27/13</a:t>
             </a:fld>
             <a:endParaRPr lang="en-US"/>
           </a:p>
@@ -1815,18 +1982,12 @@
           <a:p>
             <a:fld id="{C1FF6DA9-008F-8B48-92A6-B652298478BF}" type="slidenum">
               <a:rPr lang="en-US" smtClean="0"/>
-              <a:t>‹#›</a:t>
             </a:fld>
             <a:endParaRPr lang="en-US"/>
           </a:p>
         </p:txBody>
       </p:sp>
     </p:spTree>
-    <p:extLst>
-      <p:ext uri="{BB962C8B-B14F-4D97-AF65-F5344CB8AC3E}">
-        <p14:creationId xmlns:p14="http://schemas.microsoft.com/office/powerpoint/2010/main" val="990158736"/>
-      </p:ext>
-    </p:extLst>
   </p:cSld>
   <p:clrMapOvr>
     <a:masterClrMapping/>
@@ -1891,7 +2052,6 @@
           <a:p>
             <a:fld id="{5BCAD085-E8A6-8845-BD4E-CB4CCA059FC4}" type="datetimeFigureOut">
               <a:rPr lang="en-US" smtClean="0"/>
-              <a:t>1/27/13</a:t>
             </a:fld>
             <a:endParaRPr lang="en-US"/>
           </a:p>
@@ -1933,18 +2093,12 @@
           <a:p>
             <a:fld id="{C1FF6DA9-008F-8B48-92A6-B652298478BF}" type="slidenum">
               <a:rPr lang="en-US" smtClean="0"/>
-              <a:t>‹#›</a:t>
             </a:fld>
             <a:endParaRPr lang="en-US"/>
           </a:p>
         </p:txBody>
       </p:sp>
     </p:spTree>
-    <p:extLst>
-      <p:ext uri="{BB962C8B-B14F-4D97-AF65-F5344CB8AC3E}">
-        <p14:creationId xmlns:p14="http://schemas.microsoft.com/office/powerpoint/2010/main" val="727027711"/>
-      </p:ext>
-    </p:extLst>
   </p:cSld>
   <p:clrMapOvr>
     <a:masterClrMapping/>
@@ -1986,7 +2140,6 @@
           <a:p>
             <a:fld id="{5BCAD085-E8A6-8845-BD4E-CB4CCA059FC4}" type="datetimeFigureOut">
               <a:rPr lang="en-US" smtClean="0"/>
-              <a:t>1/27/13</a:t>
             </a:fld>
             <a:endParaRPr lang="en-US"/>
           </a:p>
@@ -2028,18 +2181,12 @@
           <a:p>
             <a:fld id="{C1FF6DA9-008F-8B48-92A6-B652298478BF}" type="slidenum">
               <a:rPr lang="en-US" smtClean="0"/>
-              <a:t>‹#›</a:t>
             </a:fld>
             <a:endParaRPr lang="en-US"/>
           </a:p>
         </p:txBody>
       </p:sp>
     </p:spTree>
-    <p:extLst>
-      <p:ext uri="{BB962C8B-B14F-4D97-AF65-F5344CB8AC3E}">
-        <p14:creationId xmlns:p14="http://schemas.microsoft.com/office/powerpoint/2010/main" val="1212999818"/>
-      </p:ext>
-    </p:extLst>
   </p:cSld>
   <p:clrMapOvr>
     <a:masterClrMapping/>
@@ -2149,6 +2296,7 @@
               <a:rPr lang="en-US" smtClean="0"/>
               <a:t>Click to edit Master text styles</a:t>
             </a:r>
+            <a:endParaRPr lang="en-US" smtClean="0"/>
           </a:p>
           <a:p>
             <a:pPr lvl="1"/>
@@ -2156,6 +2304,7 @@
               <a:rPr lang="en-US" smtClean="0"/>
               <a:t>Second level</a:t>
             </a:r>
+            <a:endParaRPr lang="en-US" smtClean="0"/>
           </a:p>
           <a:p>
             <a:pPr lvl="2"/>
@@ -2163,6 +2312,7 @@
               <a:rPr lang="en-US" smtClean="0"/>
               <a:t>Third level</a:t>
             </a:r>
+            <a:endParaRPr lang="en-US" smtClean="0"/>
           </a:p>
           <a:p>
             <a:pPr lvl="3"/>
@@ -2170,6 +2320,7 @@
               <a:rPr lang="en-US" smtClean="0"/>
               <a:t>Fourth level</a:t>
             </a:r>
+            <a:endParaRPr lang="en-US" smtClean="0"/>
           </a:p>
           <a:p>
             <a:pPr lvl="4"/>
@@ -2243,6 +2394,7 @@
               <a:rPr lang="en-US" smtClean="0"/>
               <a:t>Click to edit Master text styles</a:t>
             </a:r>
+            <a:endParaRPr lang="en-US" smtClean="0"/>
           </a:p>
         </p:txBody>
       </p:sp>
@@ -2263,7 +2415,6 @@
           <a:p>
             <a:fld id="{5BCAD085-E8A6-8845-BD4E-CB4CCA059FC4}" type="datetimeFigureOut">
               <a:rPr lang="en-US" smtClean="0"/>
-              <a:t>1/27/13</a:t>
             </a:fld>
             <a:endParaRPr lang="en-US"/>
           </a:p>
@@ -2305,18 +2456,12 @@
           <a:p>
             <a:fld id="{C1FF6DA9-008F-8B48-92A6-B652298478BF}" type="slidenum">
               <a:rPr lang="en-US" smtClean="0"/>
-              <a:t>‹#›</a:t>
             </a:fld>
             <a:endParaRPr lang="en-US"/>
           </a:p>
         </p:txBody>
       </p:sp>
     </p:spTree>
-    <p:extLst>
-      <p:ext uri="{BB962C8B-B14F-4D97-AF65-F5344CB8AC3E}">
-        <p14:creationId xmlns:p14="http://schemas.microsoft.com/office/powerpoint/2010/main" val="1840726560"/>
-      </p:ext>
-    </p:extLst>
   </p:cSld>
   <p:clrMapOvr>
     <a:masterClrMapping/>
@@ -2496,6 +2641,7 @@
               <a:rPr lang="en-US" smtClean="0"/>
               <a:t>Click to edit Master text styles</a:t>
             </a:r>
+            <a:endParaRPr lang="en-US" smtClean="0"/>
           </a:p>
         </p:txBody>
       </p:sp>
@@ -2516,7 +2662,6 @@
           <a:p>
             <a:fld id="{5BCAD085-E8A6-8845-BD4E-CB4CCA059FC4}" type="datetimeFigureOut">
               <a:rPr lang="en-US" smtClean="0"/>
-              <a:t>1/27/13</a:t>
             </a:fld>
             <a:endParaRPr lang="en-US"/>
           </a:p>
@@ -2558,18 +2703,12 @@
           <a:p>
             <a:fld id="{C1FF6DA9-008F-8B48-92A6-B652298478BF}" type="slidenum">
               <a:rPr lang="en-US" smtClean="0"/>
-              <a:t>‹#›</a:t>
             </a:fld>
             <a:endParaRPr lang="en-US"/>
           </a:p>
         </p:txBody>
       </p:sp>
     </p:spTree>
-    <p:extLst>
-      <p:ext uri="{BB962C8B-B14F-4D97-AF65-F5344CB8AC3E}">
-        <p14:creationId xmlns:p14="http://schemas.microsoft.com/office/powerpoint/2010/main" val="3889236939"/>
-      </p:ext>
-    </p:extLst>
   </p:cSld>
   <p:clrMapOvr>
     <a:masterClrMapping/>
@@ -2662,6 +2801,7 @@
               <a:rPr lang="en-US" smtClean="0"/>
               <a:t>Click to edit Master text styles</a:t>
             </a:r>
+            <a:endParaRPr lang="en-US" smtClean="0"/>
           </a:p>
           <a:p>
             <a:pPr lvl="1"/>
@@ -2669,6 +2809,7 @@
               <a:rPr lang="en-US" smtClean="0"/>
               <a:t>Second level</a:t>
             </a:r>
+            <a:endParaRPr lang="en-US" smtClean="0"/>
           </a:p>
           <a:p>
             <a:pPr lvl="2"/>
@@ -2676,6 +2817,7 @@
               <a:rPr lang="en-US" smtClean="0"/>
               <a:t>Third level</a:t>
             </a:r>
+            <a:endParaRPr lang="en-US" smtClean="0"/>
           </a:p>
           <a:p>
             <a:pPr lvl="3"/>
@@ -2683,6 +2825,7 @@
               <a:rPr lang="en-US" smtClean="0"/>
               <a:t>Fourth level</a:t>
             </a:r>
+            <a:endParaRPr lang="en-US" smtClean="0"/>
           </a:p>
           <a:p>
             <a:pPr lvl="4"/>
@@ -2729,7 +2872,6 @@
           <a:p>
             <a:fld id="{5BCAD085-E8A6-8845-BD4E-CB4CCA059FC4}" type="datetimeFigureOut">
               <a:rPr lang="en-US" smtClean="0"/>
-              <a:t>1/27/13</a:t>
             </a:fld>
             <a:endParaRPr lang="en-US"/>
           </a:p>
@@ -2807,18 +2949,12 @@
           <a:p>
             <a:fld id="{C1FF6DA9-008F-8B48-92A6-B652298478BF}" type="slidenum">
               <a:rPr lang="en-US" smtClean="0"/>
-              <a:t>‹#›</a:t>
             </a:fld>
             <a:endParaRPr lang="en-US"/>
           </a:p>
         </p:txBody>
       </p:sp>
     </p:spTree>
-    <p:extLst>
-      <p:ext uri="{BB962C8B-B14F-4D97-AF65-F5344CB8AC3E}">
-        <p14:creationId xmlns:p14="http://schemas.microsoft.com/office/powerpoint/2010/main" val="2209977519"/>
-      </p:ext>
-    </p:extLst>
   </p:cSld>
   <p:clrMap bg1="lt1" tx1="dk1" bg2="lt2" tx2="dk2" accent1="accent1" accent2="accent2" accent3="accent3" accent4="accent4" accent5="accent5" accent6="accent6" hlink="hlink" folHlink="folHlink"/>
   <p:sldLayoutIdLst>
@@ -2833,6 +2969,7 @@
     <p:sldLayoutId id="2147483657" r:id="rId9"/>
     <p:sldLayoutId id="2147483658" r:id="rId10"/>
     <p:sldLayoutId id="2147483659" r:id="rId11"/>
+    <p:sldLayoutId id="2147483660" r:id="rId12"/>
   </p:sldLayoutIdLst>
   <p:txStyles>
     <p:titleStyle>
@@ -2856,7 +2993,7 @@
         <a:spcBef>
           <a:spcPct val="20000"/>
         </a:spcBef>
-        <a:buFont typeface="Arial"/>
+        <a:buFont typeface="Arial" panose="020B0604020202020204"/>
         <a:buChar char="•"/>
         <a:defRPr sz="3200" kern="1200">
           <a:solidFill>
@@ -2871,7 +3008,7 @@
         <a:spcBef>
           <a:spcPct val="20000"/>
         </a:spcBef>
-        <a:buFont typeface="Arial"/>
+        <a:buFont typeface="Arial" panose="020B0604020202020204"/>
         <a:buChar char="–"/>
         <a:defRPr sz="2800" kern="1200">
           <a:solidFill>
@@ -2886,7 +3023,7 @@
         <a:spcBef>
           <a:spcPct val="20000"/>
         </a:spcBef>
-        <a:buFont typeface="Arial"/>
+        <a:buFont typeface="Arial" panose="020B0604020202020204"/>
         <a:buChar char="•"/>
         <a:defRPr sz="2400" kern="1200">
           <a:solidFill>
@@ -2901,7 +3038,7 @@
         <a:spcBef>
           <a:spcPct val="20000"/>
         </a:spcBef>
-        <a:buFont typeface="Arial"/>
+        <a:buFont typeface="Arial" panose="020B0604020202020204"/>
         <a:buChar char="–"/>
         <a:defRPr sz="2000" kern="1200">
           <a:solidFill>
@@ -2916,7 +3053,7 @@
         <a:spcBef>
           <a:spcPct val="20000"/>
         </a:spcBef>
-        <a:buFont typeface="Arial"/>
+        <a:buFont typeface="Arial" panose="020B0604020202020204"/>
         <a:buChar char="»"/>
         <a:defRPr sz="2000" kern="1200">
           <a:solidFill>
@@ -2931,7 +3068,7 @@
         <a:spcBef>
           <a:spcPct val="20000"/>
         </a:spcBef>
-        <a:buFont typeface="Arial"/>
+        <a:buFont typeface="Arial" panose="020B0604020202020204"/>
         <a:buChar char="•"/>
         <a:defRPr sz="2000" kern="1200">
           <a:solidFill>
@@ -2946,7 +3083,7 @@
         <a:spcBef>
           <a:spcPct val="20000"/>
         </a:spcBef>
-        <a:buFont typeface="Arial"/>
+        <a:buFont typeface="Arial" panose="020B0604020202020204"/>
         <a:buChar char="•"/>
         <a:defRPr sz="2000" kern="1200">
           <a:solidFill>
@@ -2961,7 +3098,7 @@
         <a:spcBef>
           <a:spcPct val="20000"/>
         </a:spcBef>
-        <a:buFont typeface="Arial"/>
+        <a:buFont typeface="Arial" panose="020B0604020202020204"/>
         <a:buChar char="•"/>
         <a:defRPr sz="2000" kern="1200">
           <a:solidFill>
@@ -2976,7 +3113,7 @@
         <a:spcBef>
           <a:spcPct val="20000"/>
         </a:spcBef>
-        <a:buFont typeface="Arial"/>
+        <a:buFont typeface="Arial" panose="020B0604020202020204"/>
         <a:buChar char="•"/>
         <a:defRPr sz="2000" kern="1200">
           <a:solidFill>
@@ -3088,7 +3225,740 @@
 </file>
 
 <file path=ppt/slides/slide1.xml><?xml version="1.0" encoding="utf-8"?>
-<p:sld xmlns:a="http://schemas.openxmlformats.org/drawingml/2006/main" xmlns:p="http://schemas.openxmlformats.org/presentationml/2006/main" xmlns:r="http://schemas.openxmlformats.org/officeDocument/2006/relationships">
+<p:sld xmlns:a="http://schemas.openxmlformats.org/drawingml/2006/main" xmlns:r="http://schemas.openxmlformats.org/officeDocument/2006/relationships" xmlns:p="http://schemas.openxmlformats.org/presentationml/2006/main" showMasterSp="0">
+  <p:cSld>
+    <p:spTree>
+      <p:nvGrpSpPr>
+        <p:cNvPr id="1" name=""/>
+        <p:cNvGrpSpPr/>
+        <p:nvPr/>
+      </p:nvGrpSpPr>
+      <p:grpSpPr>
+        <a:xfrm>
+          <a:off x="0" y="0"/>
+          <a:ext cx="0" cy="0"/>
+          <a:chOff x="0" y="0"/>
+          <a:chExt cx="0" cy="0"/>
+        </a:xfrm>
+      </p:grpSpPr>
+      <p:sp>
+        <p:nvSpPr>
+          <p:cNvPr id="17" name="标题 16"/>
+          <p:cNvSpPr>
+            <a:spLocks noGrp="1"/>
+          </p:cNvSpPr>
+          <p:nvPr>
+            <p:ph type="title"/>
+            <p:custDataLst>
+              <p:tags r:id="rId1"/>
+            </p:custDataLst>
+          </p:nvPr>
+        </p:nvSpPr>
+        <p:spPr>
+          <a:xfrm>
+            <a:off x="694764" y="360160"/>
+            <a:ext cx="5761684" cy="719963"/>
+          </a:xfrm>
+        </p:spPr>
+        <p:txBody>
+          <a:bodyPr wrap="square" lIns="0" tIns="0" rIns="0" bIns="0" anchor="b">
+            <a:normAutofit/>
+          </a:bodyPr>
+          <a:lstStyle/>
+          <a:p>
+            <a:pPr algn="l"/>
+            <a:r>
+              <a:rPr lang="en-US" b="1" spc="0" dirty="0"/>
+              <a:t>ATMOST AI</a:t>
+            </a:r>
+            <a:r>
+              <a:rPr lang="en-US" sz="1200" b="1" spc="0" dirty="0"/>
+              <a:t>(Deep Learning)</a:t>
+            </a:r>
+            <a:endParaRPr lang="en-US" sz="1200" b="1" spc="0" dirty="0"/>
+          </a:p>
+        </p:txBody>
+      </p:sp>
+      <p:sp>
+        <p:nvSpPr>
+          <p:cNvPr id="4" name="矩形 3"/>
+          <p:cNvSpPr/>
+          <p:nvPr>
+            <p:custDataLst>
+              <p:tags r:id="rId2"/>
+            </p:custDataLst>
+          </p:nvPr>
+        </p:nvSpPr>
+        <p:spPr>
+          <a:xfrm>
+            <a:off x="6957333" y="179"/>
+            <a:ext cx="5234032" cy="6857643"/>
+          </a:xfrm>
+          <a:prstGeom prst="rect">
+            <a:avLst/>
+          </a:prstGeom>
+          <a:blipFill rotWithShape="1">
+            <a:blip r:embed="rId3"/>
+            <a:stretch>
+              <a:fillRect t="-1000" r="-1000" b="-1000"/>
+            </a:stretch>
+          </a:blipFill>
+          <a:ln w="3175" cap="flat" cmpd="sng" algn="ctr">
+            <a:solidFill>
+              <a:schemeClr val="tx1">
+                <a:lumMod val="40000"/>
+                <a:lumOff val="60000"/>
+                <a:alpha val="20000"/>
+              </a:schemeClr>
+            </a:solidFill>
+            <a:prstDash val="solid"/>
+            <a:miter lim="800000"/>
+            <a:headEnd type="none" w="med" len="med"/>
+            <a:tailEnd type="none" w="med" len="med"/>
+          </a:ln>
+        </p:spPr>
+        <p:style>
+          <a:lnRef idx="2">
+            <a:schemeClr val="accent1">
+              <a:lumMod val="75000"/>
+            </a:schemeClr>
+          </a:lnRef>
+          <a:fillRef idx="1">
+            <a:schemeClr val="accent1"/>
+          </a:fillRef>
+          <a:effectRef idx="0">
+            <a:srgbClr val="FFFFFF"/>
+          </a:effectRef>
+          <a:fontRef idx="minor">
+            <a:schemeClr val="lt1"/>
+          </a:fontRef>
+        </p:style>
+        <p:txBody>
+          <a:bodyPr rtlCol="0" anchor="ctr"/>
+          <a:lstStyle/>
+          <a:p>
+            <a:pPr algn="ctr"/>
+            <a:endParaRPr lang="en-US">
+              <a:latin typeface="Arial" panose="020B0604020202020204" pitchFamily="34" charset="0"/>
+              <a:sym typeface="Arial" panose="020B0604020202020204" pitchFamily="34" charset="0"/>
+            </a:endParaRPr>
+          </a:p>
+        </p:txBody>
+      </p:sp>
+      <p:sp>
+        <p:nvSpPr>
+          <p:cNvPr id="2" name="矩形 1"/>
+          <p:cNvSpPr/>
+          <p:nvPr>
+            <p:custDataLst>
+              <p:tags r:id="rId4"/>
+            </p:custDataLst>
+          </p:nvPr>
+        </p:nvSpPr>
+        <p:spPr>
+          <a:xfrm>
+            <a:off x="1675931" y="2077338"/>
+            <a:ext cx="4299996" cy="1039382"/>
+          </a:xfrm>
+          <a:prstGeom prst="rect">
+            <a:avLst/>
+          </a:prstGeom>
+          <a:noFill/>
+        </p:spPr>
+        <p:txBody>
+          <a:bodyPr wrap="square" lIns="0" tIns="0" rIns="0" bIns="0" rtlCol="0" anchor="t" anchorCtr="0">
+            <a:normAutofit/>
+          </a:bodyPr>
+          <a:lstStyle/>
+          <a:p>
+            <a:pPr>
+              <a:lnSpc>
+                <a:spcPct val="150000"/>
+              </a:lnSpc>
+              <a:spcBef>
+                <a:spcPct val="0"/>
+              </a:spcBef>
+              <a:spcAft>
+                <a:spcPct val="0"/>
+              </a:spcAft>
+            </a:pPr>
+            <a:r>
+              <a:rPr lang="en-US" sz="1600" dirty="0">
+                <a:solidFill>
+                  <a:schemeClr val="tx1">
+                    <a:lumMod val="85000"/>
+                    <a:lumOff val="15000"/>
+                  </a:schemeClr>
+                </a:solidFill>
+                <a:latin typeface="+mn-lt"/>
+              </a:rPr>
+              <a:t>I am a frontened Developer with deep learning Ai skills</a:t>
+            </a:r>
+            <a:endParaRPr lang="en-US" sz="1600" dirty="0">
+              <a:solidFill>
+                <a:schemeClr val="tx1">
+                  <a:lumMod val="85000"/>
+                  <a:lumOff val="15000"/>
+                </a:schemeClr>
+              </a:solidFill>
+              <a:latin typeface="+mn-lt"/>
+            </a:endParaRPr>
+          </a:p>
+        </p:txBody>
+      </p:sp>
+      <p:sp>
+        <p:nvSpPr>
+          <p:cNvPr id="3" name="矩形 2"/>
+          <p:cNvSpPr/>
+          <p:nvPr>
+            <p:custDataLst>
+              <p:tags r:id="rId5"/>
+            </p:custDataLst>
+          </p:nvPr>
+        </p:nvSpPr>
+        <p:spPr>
+          <a:xfrm>
+            <a:off x="1675931" y="1713562"/>
+            <a:ext cx="4299996" cy="322538"/>
+          </a:xfrm>
+          <a:prstGeom prst="rect">
+            <a:avLst/>
+          </a:prstGeom>
+          <a:noFill/>
+        </p:spPr>
+        <p:txBody>
+          <a:bodyPr wrap="square" lIns="0" tIns="0" rIns="0" bIns="0" rtlCol="0" anchor="b">
+            <a:normAutofit/>
+          </a:bodyPr>
+          <a:lstStyle/>
+          <a:p>
+            <a:pPr>
+              <a:spcBef>
+                <a:spcPct val="0"/>
+              </a:spcBef>
+              <a:spcAft>
+                <a:spcPct val="0"/>
+              </a:spcAft>
+            </a:pPr>
+            <a:r>
+              <a:rPr lang="en-US" sz="2000" b="1" dirty="0">
+                <a:solidFill>
+                  <a:schemeClr val="tx1"/>
+                </a:solidFill>
+                <a:latin typeface="+mj-lt"/>
+              </a:rPr>
+              <a:t>Ghulam Alamgeer</a:t>
+            </a:r>
+            <a:endParaRPr lang="en-US" sz="2000" b="1" dirty="0">
+              <a:solidFill>
+                <a:schemeClr val="tx1"/>
+              </a:solidFill>
+              <a:latin typeface="+mj-lt"/>
+            </a:endParaRPr>
+          </a:p>
+        </p:txBody>
+      </p:sp>
+      <p:sp>
+        <p:nvSpPr>
+          <p:cNvPr id="14" name="椭圆 13"/>
+          <p:cNvSpPr/>
+          <p:nvPr>
+            <p:custDataLst>
+              <p:tags r:id="rId6"/>
+            </p:custDataLst>
+          </p:nvPr>
+        </p:nvSpPr>
+        <p:spPr>
+          <a:xfrm>
+            <a:off x="720305" y="1765066"/>
+            <a:ext cx="667350" cy="667350"/>
+          </a:xfrm>
+          <a:prstGeom prst="ellipse">
+            <a:avLst/>
+          </a:prstGeom>
+          <a:solidFill>
+            <a:schemeClr val="accent1"/>
+          </a:solidFill>
+          <a:ln w="25400">
+            <a:noFill/>
+          </a:ln>
+          <a:effectLst>
+            <a:outerShdw blurRad="254000" dist="76200" dir="5399998" algn="ctr" rotWithShape="0">
+              <a:schemeClr val="accent1">
+                <a:alpha val="25000"/>
+              </a:schemeClr>
+            </a:outerShdw>
+          </a:effectLst>
+        </p:spPr>
+        <p:style>
+          <a:lnRef idx="2">
+            <a:schemeClr val="accent1">
+              <a:lumMod val="75000"/>
+            </a:schemeClr>
+          </a:lnRef>
+          <a:fillRef idx="1">
+            <a:schemeClr val="accent1"/>
+          </a:fillRef>
+          <a:effectRef idx="0">
+            <a:srgbClr val="FFFFFF"/>
+          </a:effectRef>
+          <a:fontRef idx="minor">
+            <a:schemeClr val="lt1"/>
+          </a:fontRef>
+        </p:style>
+        <p:txBody>
+          <a:bodyPr vertOverflow="overflow" horzOverflow="overflow" vert="horz" wrap="none" lIns="0" tIns="0" rIns="0" bIns="0" numCol="1" spcCol="0" rtlCol="0" fromWordArt="0" anchor="ctr" anchorCtr="0" forceAA="0" compatLnSpc="1">
+            <a:normAutofit/>
+          </a:bodyPr>
+          <a:lstStyle/>
+          <a:p>
+            <a:pPr lvl="0" indent="0" algn="ctr" fontAlgn="auto">
+              <a:spcBef>
+                <a:spcPct val="0"/>
+              </a:spcBef>
+              <a:spcAft>
+                <a:spcPct val="0"/>
+              </a:spcAft>
+              <a:buClrTx/>
+              <a:buSzTx/>
+              <a:buFontTx/>
+            </a:pPr>
+            <a:r>
+              <a:rPr lang="en-US" sz="1200" b="1" dirty="0">
+                <a:latin typeface="+mn-ea"/>
+                <a:sym typeface="+mn-ea"/>
+              </a:rPr>
+              <a:t>Name</a:t>
+            </a:r>
+            <a:endParaRPr lang="en-US" sz="1200" b="1" dirty="0">
+              <a:latin typeface="+mn-ea"/>
+              <a:sym typeface="+mn-ea"/>
+            </a:endParaRPr>
+          </a:p>
+        </p:txBody>
+      </p:sp>
+      <p:sp>
+        <p:nvSpPr>
+          <p:cNvPr id="7" name="矩形 6"/>
+          <p:cNvSpPr/>
+          <p:nvPr>
+            <p:custDataLst>
+              <p:tags r:id="rId7"/>
+            </p:custDataLst>
+          </p:nvPr>
+        </p:nvSpPr>
+        <p:spPr>
+          <a:xfrm>
+            <a:off x="1676566" y="3689393"/>
+            <a:ext cx="4299996" cy="1039382"/>
+          </a:xfrm>
+          <a:prstGeom prst="rect">
+            <a:avLst/>
+          </a:prstGeom>
+          <a:noFill/>
+        </p:spPr>
+        <p:txBody>
+          <a:bodyPr wrap="square" lIns="0" tIns="0" rIns="0" bIns="0" rtlCol="0" anchor="t" anchorCtr="0">
+            <a:normAutofit/>
+          </a:bodyPr>
+          <a:lstStyle/>
+          <a:p>
+            <a:pPr>
+              <a:lnSpc>
+                <a:spcPct val="150000"/>
+              </a:lnSpc>
+              <a:spcBef>
+                <a:spcPct val="0"/>
+              </a:spcBef>
+              <a:spcAft>
+                <a:spcPct val="0"/>
+              </a:spcAft>
+            </a:pPr>
+            <a:r>
+              <a:rPr lang="en-US" sz="1600" dirty="0">
+                <a:solidFill>
+                  <a:schemeClr val="tx1">
+                    <a:lumMod val="85000"/>
+                    <a:lumOff val="15000"/>
+                  </a:schemeClr>
+                </a:solidFill>
+                <a:latin typeface="+mn-lt"/>
+              </a:rPr>
+              <a:t>i am studying in university, Lahore</a:t>
+            </a:r>
+            <a:endParaRPr lang="en-US" sz="1600" dirty="0">
+              <a:solidFill>
+                <a:schemeClr val="tx1">
+                  <a:lumMod val="85000"/>
+                  <a:lumOff val="15000"/>
+                </a:schemeClr>
+              </a:solidFill>
+              <a:latin typeface="+mn-lt"/>
+            </a:endParaRPr>
+          </a:p>
+        </p:txBody>
+      </p:sp>
+      <p:sp>
+        <p:nvSpPr>
+          <p:cNvPr id="8" name="矩形 7"/>
+          <p:cNvSpPr/>
+          <p:nvPr>
+            <p:custDataLst>
+              <p:tags r:id="rId8"/>
+            </p:custDataLst>
+          </p:nvPr>
+        </p:nvSpPr>
+        <p:spPr>
+          <a:xfrm>
+            <a:off x="1676566" y="3325617"/>
+            <a:ext cx="4299996" cy="322538"/>
+          </a:xfrm>
+          <a:prstGeom prst="rect">
+            <a:avLst/>
+          </a:prstGeom>
+          <a:noFill/>
+        </p:spPr>
+        <p:txBody>
+          <a:bodyPr wrap="square" lIns="0" tIns="0" rIns="0" bIns="0" rtlCol="0" anchor="b">
+            <a:normAutofit/>
+          </a:bodyPr>
+          <a:lstStyle/>
+          <a:p>
+            <a:pPr>
+              <a:spcBef>
+                <a:spcPct val="0"/>
+              </a:spcBef>
+              <a:spcAft>
+                <a:spcPct val="0"/>
+              </a:spcAft>
+            </a:pPr>
+            <a:r>
+              <a:rPr lang="en-US" sz="2000" b="1" dirty="0">
+                <a:solidFill>
+                  <a:schemeClr val="tx1"/>
+                </a:solidFill>
+                <a:latin typeface="+mj-lt"/>
+              </a:rPr>
+              <a:t>SU92-BSCSM-F23-605</a:t>
+            </a:r>
+            <a:endParaRPr lang="en-US" sz="2000" b="1" dirty="0">
+              <a:solidFill>
+                <a:schemeClr val="tx1"/>
+              </a:solidFill>
+              <a:latin typeface="+mj-lt"/>
+            </a:endParaRPr>
+          </a:p>
+        </p:txBody>
+      </p:sp>
+      <p:sp>
+        <p:nvSpPr>
+          <p:cNvPr id="15" name="椭圆 14"/>
+          <p:cNvSpPr/>
+          <p:nvPr>
+            <p:custDataLst>
+              <p:tags r:id="rId9"/>
+            </p:custDataLst>
+          </p:nvPr>
+        </p:nvSpPr>
+        <p:spPr>
+          <a:xfrm>
+            <a:off x="720305" y="3392324"/>
+            <a:ext cx="667350" cy="667350"/>
+          </a:xfrm>
+          <a:prstGeom prst="ellipse">
+            <a:avLst/>
+          </a:prstGeom>
+          <a:solidFill>
+            <a:schemeClr val="accent1"/>
+          </a:solidFill>
+          <a:ln w="25400">
+            <a:noFill/>
+          </a:ln>
+          <a:effectLst>
+            <a:outerShdw blurRad="254000" dist="76200" dir="5399998" algn="ctr" rotWithShape="0">
+              <a:schemeClr val="accent1">
+                <a:alpha val="25000"/>
+              </a:schemeClr>
+            </a:outerShdw>
+          </a:effectLst>
+        </p:spPr>
+        <p:style>
+          <a:lnRef idx="2">
+            <a:schemeClr val="accent1">
+              <a:lumMod val="75000"/>
+            </a:schemeClr>
+          </a:lnRef>
+          <a:fillRef idx="1">
+            <a:schemeClr val="accent1"/>
+          </a:fillRef>
+          <a:effectRef idx="0">
+            <a:srgbClr val="FFFFFF"/>
+          </a:effectRef>
+          <a:fontRef idx="minor">
+            <a:schemeClr val="lt1"/>
+          </a:fontRef>
+        </p:style>
+        <p:txBody>
+          <a:bodyPr vertOverflow="overflow" horzOverflow="overflow" vert="horz" wrap="none" lIns="0" tIns="0" rIns="0" bIns="0" numCol="1" spcCol="0" rtlCol="0" fromWordArt="0" anchor="ctr" anchorCtr="0" forceAA="0" compatLnSpc="1">
+            <a:normAutofit/>
+          </a:bodyPr>
+          <a:lstStyle/>
+          <a:p>
+            <a:pPr lvl="0" indent="0" algn="ctr" fontAlgn="auto">
+              <a:spcBef>
+                <a:spcPct val="0"/>
+              </a:spcBef>
+              <a:spcAft>
+                <a:spcPct val="0"/>
+              </a:spcAft>
+              <a:buClrTx/>
+              <a:buSzTx/>
+              <a:buFontTx/>
+            </a:pPr>
+            <a:r>
+              <a:rPr lang="en-US" sz="1400" b="1" dirty="0">
+                <a:latin typeface="+mn-lt"/>
+                <a:sym typeface="+mn-lt"/>
+              </a:rPr>
+              <a:t>Roll#</a:t>
+            </a:r>
+            <a:endParaRPr lang="en-US" sz="1400" b="1" dirty="0">
+              <a:latin typeface="+mn-ea"/>
+              <a:sym typeface="+mn-ea"/>
+            </a:endParaRPr>
+          </a:p>
+        </p:txBody>
+      </p:sp>
+      <p:sp>
+        <p:nvSpPr>
+          <p:cNvPr id="9" name="矩形 8"/>
+          <p:cNvSpPr/>
+          <p:nvPr>
+            <p:custDataLst>
+              <p:tags r:id="rId10"/>
+            </p:custDataLst>
+          </p:nvPr>
+        </p:nvSpPr>
+        <p:spPr>
+          <a:xfrm>
+            <a:off x="1677201" y="5301448"/>
+            <a:ext cx="4299996" cy="1039382"/>
+          </a:xfrm>
+          <a:prstGeom prst="rect">
+            <a:avLst/>
+          </a:prstGeom>
+          <a:noFill/>
+        </p:spPr>
+        <p:txBody>
+          <a:bodyPr wrap="square" lIns="0" tIns="0" rIns="0" bIns="0" rtlCol="0" anchor="t" anchorCtr="0">
+            <a:normAutofit/>
+          </a:bodyPr>
+          <a:lstStyle/>
+          <a:p>
+            <a:pPr>
+              <a:lnSpc>
+                <a:spcPct val="150000"/>
+              </a:lnSpc>
+              <a:spcBef>
+                <a:spcPct val="0"/>
+              </a:spcBef>
+              <a:spcAft>
+                <a:spcPct val="0"/>
+              </a:spcAft>
+            </a:pPr>
+            <a:r>
+              <a:rPr lang="en-US" sz="1600" dirty="0">
+                <a:solidFill>
+                  <a:schemeClr val="tx1">
+                    <a:lumMod val="85000"/>
+                    <a:lumOff val="15000"/>
+                  </a:schemeClr>
+                </a:solidFill>
+                <a:latin typeface="+mn-lt"/>
+              </a:rPr>
+              <a:t>My department is computer science</a:t>
+            </a:r>
+            <a:endParaRPr lang="en-US" sz="1600" dirty="0">
+              <a:solidFill>
+                <a:schemeClr val="tx1">
+                  <a:lumMod val="85000"/>
+                  <a:lumOff val="15000"/>
+                </a:schemeClr>
+              </a:solidFill>
+              <a:latin typeface="+mn-lt"/>
+            </a:endParaRPr>
+          </a:p>
+        </p:txBody>
+      </p:sp>
+      <p:sp>
+        <p:nvSpPr>
+          <p:cNvPr id="12" name="矩形 11"/>
+          <p:cNvSpPr/>
+          <p:nvPr>
+            <p:custDataLst>
+              <p:tags r:id="rId11"/>
+            </p:custDataLst>
+          </p:nvPr>
+        </p:nvSpPr>
+        <p:spPr>
+          <a:xfrm>
+            <a:off x="1677201" y="4937672"/>
+            <a:ext cx="4299996" cy="322538"/>
+          </a:xfrm>
+          <a:prstGeom prst="rect">
+            <a:avLst/>
+          </a:prstGeom>
+          <a:noFill/>
+        </p:spPr>
+        <p:txBody>
+          <a:bodyPr wrap="square" lIns="0" tIns="0" rIns="0" bIns="0" rtlCol="0" anchor="b">
+            <a:normAutofit/>
+          </a:bodyPr>
+          <a:lstStyle/>
+          <a:p>
+            <a:pPr>
+              <a:spcBef>
+                <a:spcPct val="0"/>
+              </a:spcBef>
+              <a:spcAft>
+                <a:spcPct val="0"/>
+              </a:spcAft>
+            </a:pPr>
+            <a:r>
+              <a:rPr lang="en-US" sz="2000" b="1" dirty="0">
+                <a:solidFill>
+                  <a:schemeClr val="tx1"/>
+                </a:solidFill>
+                <a:latin typeface="+mj-lt"/>
+              </a:rPr>
+              <a:t>7-B</a:t>
+            </a:r>
+            <a:endParaRPr lang="en-US" sz="2000" b="1" dirty="0">
+              <a:solidFill>
+                <a:schemeClr val="tx1"/>
+              </a:solidFill>
+              <a:latin typeface="+mj-lt"/>
+            </a:endParaRPr>
+          </a:p>
+        </p:txBody>
+      </p:sp>
+      <p:sp>
+        <p:nvSpPr>
+          <p:cNvPr id="16" name="椭圆 15"/>
+          <p:cNvSpPr/>
+          <p:nvPr>
+            <p:custDataLst>
+              <p:tags r:id="rId12"/>
+            </p:custDataLst>
+          </p:nvPr>
+        </p:nvSpPr>
+        <p:spPr>
+          <a:xfrm>
+            <a:off x="720305" y="5002330"/>
+            <a:ext cx="667350" cy="667350"/>
+          </a:xfrm>
+          <a:prstGeom prst="ellipse">
+            <a:avLst/>
+          </a:prstGeom>
+          <a:solidFill>
+            <a:schemeClr val="accent1"/>
+          </a:solidFill>
+          <a:ln w="25400">
+            <a:noFill/>
+          </a:ln>
+          <a:effectLst>
+            <a:outerShdw blurRad="254000" dist="76200" dir="5399998" algn="ctr" rotWithShape="0">
+              <a:schemeClr val="accent1">
+                <a:alpha val="25000"/>
+              </a:schemeClr>
+            </a:outerShdw>
+          </a:effectLst>
+        </p:spPr>
+        <p:style>
+          <a:lnRef idx="2">
+            <a:schemeClr val="accent1">
+              <a:lumMod val="75000"/>
+            </a:schemeClr>
+          </a:lnRef>
+          <a:fillRef idx="1">
+            <a:schemeClr val="accent1"/>
+          </a:fillRef>
+          <a:effectRef idx="0">
+            <a:srgbClr val="FFFFFF"/>
+          </a:effectRef>
+          <a:fontRef idx="minor">
+            <a:schemeClr val="lt1"/>
+          </a:fontRef>
+        </p:style>
+        <p:txBody>
+          <a:bodyPr vertOverflow="overflow" horzOverflow="overflow" vert="horz" wrap="none" lIns="0" tIns="0" rIns="0" bIns="0" numCol="1" spcCol="0" rtlCol="0" fromWordArt="0" anchor="ctr" anchorCtr="0" forceAA="0" compatLnSpc="1">
+            <a:normAutofit/>
+          </a:bodyPr>
+          <a:lstStyle/>
+          <a:p>
+            <a:pPr lvl="0" indent="0" algn="ctr" fontAlgn="auto">
+              <a:spcBef>
+                <a:spcPct val="0"/>
+              </a:spcBef>
+              <a:spcAft>
+                <a:spcPct val="0"/>
+              </a:spcAft>
+              <a:buClrTx/>
+              <a:buSzTx/>
+              <a:buFontTx/>
+            </a:pPr>
+            <a:r>
+              <a:rPr lang="en-US" sz="1400" b="1" dirty="0">
+                <a:latin typeface="+mn-lt"/>
+                <a:sym typeface="+mn-lt"/>
+              </a:rPr>
+              <a:t>Section</a:t>
+            </a:r>
+            <a:endParaRPr lang="en-US" sz="1400" b="1" dirty="0">
+              <a:latin typeface="+mn-ea"/>
+              <a:sym typeface="+mn-ea"/>
+            </a:endParaRPr>
+          </a:p>
+        </p:txBody>
+      </p:sp>
+      <p:sp>
+        <p:nvSpPr>
+          <p:cNvPr id="5" name="Text Box 4"/>
+          <p:cNvSpPr txBox="1"/>
+          <p:nvPr/>
+        </p:nvSpPr>
+        <p:spPr>
+          <a:xfrm>
+            <a:off x="2306320" y="3538855"/>
+            <a:ext cx="4064000" cy="368300"/>
+          </a:xfrm>
+          <a:prstGeom prst="rect">
+            <a:avLst/>
+          </a:prstGeom>
+          <a:noFill/>
+        </p:spPr>
+        <p:txBody>
+          <a:bodyPr wrap="square" rtlCol="0">
+            <a:spAutoFit/>
+          </a:bodyPr>
+          <a:p>
+            <a:endParaRPr lang="en-US"/>
+          </a:p>
+        </p:txBody>
+      </p:sp>
+    </p:spTree>
+    <p:custDataLst>
+      <p:tags r:id="rId13"/>
+    </p:custDataLst>
+  </p:cSld>
+  <p:clrMapOvr>
+    <a:masterClrMapping/>
+  </p:clrMapOvr>
+</p:sld>
+</file>
+
+<file path=ppt/slides/slide10.xml><?xml version="1.0" encoding="utf-8"?>
+<p:sld xmlns:a="http://schemas.openxmlformats.org/drawingml/2006/main" xmlns:r="http://schemas.openxmlformats.org/officeDocument/2006/relationships" xmlns:p="http://schemas.openxmlformats.org/presentationml/2006/main">
   <p:cSld>
     <p:bg>
       <p:bgPr>
@@ -3179,7 +4049,7 @@
               </a:defRPr>
             </a:pPr>
             <a:r>
-              <a:t>ATMOS AI</a:t>
+              <a:t>Limitations &amp; Future Work</a:t>
             </a:r>
           </a:p>
         </p:txBody>
@@ -3214,7 +4084,7 @@
               </a:defRPr>
             </a:pPr>
             <a:r>
-              <a:t>Color &amp; Weather Intelligence</a:t>
+              <a:t>What to improve next</a:t>
             </a:r>
           </a:p>
         </p:txBody>
@@ -3290,7 +4160,7 @@
               <a:spcAft>
                 <a:spcPts val="1400"/>
               </a:spcAft>
-              <a:defRPr sz="1900">
+              <a:defRPr sz="1600">
                 <a:solidFill>
                   <a:srgbClr val="F4F7FF"/>
                 </a:solidFill>
@@ -3298,7 +4168,7 @@
               </a:defRPr>
             </a:pPr>
             <a:r>
-              <a:t>•  Deep Learning Semester Project</a:t>
+              <a:t>•  Verify dataset source, license, image counts and split strategy.</a:t>
             </a:r>
           </a:p>
           <a:p>
@@ -3306,7 +4176,7 @@
               <a:spcAft>
                 <a:spcPts val="1400"/>
               </a:spcAft>
-              <a:defRPr sz="1900">
+              <a:defRPr sz="1600">
                 <a:solidFill>
                   <a:srgbClr val="F4F7FF"/>
                 </a:solidFill>
@@ -3314,7 +4184,55 @@
               </a:defRPr>
             </a:pPr>
             <a:r>
-              <a:t>•  Browser-based image analysis with TensorFlow.js</a:t>
+              <a:t>•  Measure metrics separately for each output head.</a:t>
+            </a:r>
+          </a:p>
+          <a:p>
+            <a:pPr>
+              <a:spcAft>
+                <a:spcPts val="1400"/>
+              </a:spcAft>
+              <a:defRPr sz="1600">
+                <a:solidFill>
+                  <a:srgbClr val="F4F7FF"/>
+                </a:solidFill>
+                <a:latin typeface="Aptos"/>
+              </a:defRPr>
+            </a:pPr>
+            <a:r>
+              <a:t>•  Validate weather heuristic against varied indoor/outdoor scenes.</a:t>
+            </a:r>
+          </a:p>
+          <a:p>
+            <a:pPr>
+              <a:spcAft>
+                <a:spcPts val="1400"/>
+              </a:spcAft>
+              <a:defRPr sz="1600">
+                <a:solidFill>
+                  <a:srgbClr val="F4F7FF"/>
+                </a:solidFill>
+                <a:latin typeface="Aptos"/>
+              </a:defRPr>
+            </a:pPr>
+            <a:r>
+              <a:t>•  Improve accessibility and mobile-browser testing.</a:t>
+            </a:r>
+          </a:p>
+          <a:p>
+            <a:pPr>
+              <a:spcAft>
+                <a:spcPts val="1400"/>
+              </a:spcAft>
+              <a:defRPr sz="1600">
+                <a:solidFill>
+                  <a:srgbClr val="F4F7FF"/>
+                </a:solidFill>
+                <a:latin typeface="Aptos"/>
+              </a:defRPr>
+            </a:pPr>
+            <a:r>
+              <a:t>•  Add examples of correct and incorrect predictions.</a:t>
             </a:r>
           </a:p>
         </p:txBody>
@@ -3349,7 +4267,7 @@
               </a:defRPr>
             </a:pPr>
             <a:r>
-              <a:t>ATMOS AI  •  Deep Learning Semester Project                                      01 / 10</a:t>
+              <a:t>ATMOS AI  •  Deep Learning Semester Project                                      09 / 10</a:t>
             </a:r>
           </a:p>
         </p:txBody>
@@ -3362,8 +4280,8 @@
 </p:sld>
 </file>
 
-<file path=ppt/slides/slide10.xml><?xml version="1.0" encoding="utf-8"?>
-<p:sld xmlns:a="http://schemas.openxmlformats.org/drawingml/2006/main" xmlns:p="http://schemas.openxmlformats.org/presentationml/2006/main" xmlns:r="http://schemas.openxmlformats.org/officeDocument/2006/relationships">
+<file path=ppt/slides/slide11.xml><?xml version="1.0" encoding="utf-8"?>
+<p:sld xmlns:a="http://schemas.openxmlformats.org/drawingml/2006/main" xmlns:r="http://schemas.openxmlformats.org/officeDocument/2006/relationships" xmlns:p="http://schemas.openxmlformats.org/presentationml/2006/main">
   <p:cSld>
     <p:bg>
       <p:bgPr>
@@ -3686,7 +4604,7 @@
 </file>
 
 <file path=ppt/slides/slide2.xml><?xml version="1.0" encoding="utf-8"?>
-<p:sld xmlns:a="http://schemas.openxmlformats.org/drawingml/2006/main" xmlns:p="http://schemas.openxmlformats.org/presentationml/2006/main" xmlns:r="http://schemas.openxmlformats.org/officeDocument/2006/relationships">
+<p:sld xmlns:a="http://schemas.openxmlformats.org/drawingml/2006/main" xmlns:r="http://schemas.openxmlformats.org/officeDocument/2006/relationships" xmlns:p="http://schemas.openxmlformats.org/presentationml/2006/main">
   <p:cSld>
     <p:bg>
       <p:bgPr>
@@ -3777,7 +4695,7 @@
               </a:defRPr>
             </a:pPr>
             <a:r>
-              <a:t>Problem &amp; Motivation</a:t>
+              <a:t>ATMOS AI</a:t>
             </a:r>
           </a:p>
         </p:txBody>
@@ -3812,7 +4730,7 @@
               </a:defRPr>
             </a:pPr>
             <a:r>
-              <a:t>Why this project?</a:t>
+              <a:t>Color &amp; Weather Intelligence</a:t>
             </a:r>
           </a:p>
         </p:txBody>
@@ -3896,7 +4814,7 @@
               </a:defRPr>
             </a:pPr>
             <a:r>
-              <a:t>•  Visual scenes contain multiple useful cues: color, illumination and sky appearance.</a:t>
+              <a:t>•  Deep Learning Semester Project</a:t>
             </a:r>
           </a:p>
           <a:p>
@@ -3912,23 +4830,7 @@
               </a:defRPr>
             </a:pPr>
             <a:r>
-              <a:t>•  A single interface can present these cues from a photo or camera frame.</a:t>
-            </a:r>
-          </a:p>
-          <a:p>
-            <a:pPr>
-              <a:spcAft>
-                <a:spcPts val="1400"/>
-              </a:spcAft>
-              <a:defRPr sz="1900">
-                <a:solidFill>
-                  <a:srgbClr val="F4F7FF"/>
-                </a:solidFill>
-                <a:latin typeface="Aptos"/>
-              </a:defRPr>
-            </a:pPr>
-            <a:r>
-              <a:t>•  The project is an educational visual analyzer, not a certified weather forecast.</a:t>
+              <a:t>•  Browser-based image analysis with TensorFlow.js</a:t>
             </a:r>
           </a:p>
         </p:txBody>
@@ -3963,7 +4865,7 @@
               </a:defRPr>
             </a:pPr>
             <a:r>
-              <a:t>ATMOS AI  •  Deep Learning Semester Project                                      02 / 10</a:t>
+              <a:t>ATMOS AI  •  Deep Learning Semester Project                                      01 / 10</a:t>
             </a:r>
           </a:p>
         </p:txBody>
@@ -3977,7 +4879,7 @@
 </file>
 
 <file path=ppt/slides/slide3.xml><?xml version="1.0" encoding="utf-8"?>
-<p:sld xmlns:a="http://schemas.openxmlformats.org/drawingml/2006/main" xmlns:p="http://schemas.openxmlformats.org/presentationml/2006/main" xmlns:r="http://schemas.openxmlformats.org/officeDocument/2006/relationships">
+<p:sld xmlns:a="http://schemas.openxmlformats.org/drawingml/2006/main" xmlns:r="http://schemas.openxmlformats.org/officeDocument/2006/relationships" xmlns:p="http://schemas.openxmlformats.org/presentationml/2006/main">
   <p:cSld>
     <p:bg>
       <p:bgPr>
@@ -4068,7 +4970,7 @@
               </a:defRPr>
             </a:pPr>
             <a:r>
-              <a:t>Project Objectives</a:t>
+              <a:t>Problem &amp; Motivation</a:t>
             </a:r>
           </a:p>
         </p:txBody>
@@ -4103,7 +5005,7 @@
               </a:defRPr>
             </a:pPr>
             <a:r>
-              <a:t>What the system does</a:t>
+              <a:t>Why this project?</a:t>
             </a:r>
           </a:p>
         </p:txBody>
@@ -4187,7 +5089,7 @@
               </a:defRPr>
             </a:pPr>
             <a:r>
-              <a:t>•  Accept an uploaded photo or live camera stream.</a:t>
+              <a:t>•  Visual scenes contain multiple useful cues: color, illumination and sky appearance.</a:t>
             </a:r>
           </a:p>
           <a:p>
@@ -4203,7 +5105,7 @@
               </a:defRPr>
             </a:pPr>
             <a:r>
-              <a:t>•  Run a trained model locally in the browser.</a:t>
+              <a:t>•  A single interface can present these cues from a photo or camera frame.</a:t>
             </a:r>
           </a:p>
           <a:p>
@@ -4219,23 +5121,7 @@
               </a:defRPr>
             </a:pPr>
             <a:r>
-              <a:t>•  Predict color, brightness, temperature-tone and weather categories.</a:t>
-            </a:r>
-          </a:p>
-          <a:p>
-            <a:pPr>
-              <a:spcAft>
-                <a:spcPts val="1400"/>
-              </a:spcAft>
-              <a:defRPr sz="1900">
-                <a:solidFill>
-                  <a:srgbClr val="F4F7FF"/>
-                </a:solidFill>
-                <a:latin typeface="Aptos"/>
-              </a:defRPr>
-            </a:pPr>
-            <a:r>
-              <a:t>•  Show a responsive dashboard with confidence-style outputs and color bars.</a:t>
+              <a:t>•  The project is an educational visual analyzer, not a certified weather forecast.</a:t>
             </a:r>
           </a:p>
         </p:txBody>
@@ -4270,7 +5156,7 @@
               </a:defRPr>
             </a:pPr>
             <a:r>
-              <a:t>ATMOS AI  •  Deep Learning Semester Project                                      03 / 10</a:t>
+              <a:t>ATMOS AI  •  Deep Learning Semester Project                                      02 / 10</a:t>
             </a:r>
           </a:p>
         </p:txBody>
@@ -4284,7 +5170,7 @@
 </file>
 
 <file path=ppt/slides/slide4.xml><?xml version="1.0" encoding="utf-8"?>
-<p:sld xmlns:a="http://schemas.openxmlformats.org/drawingml/2006/main" xmlns:p="http://schemas.openxmlformats.org/presentationml/2006/main" xmlns:r="http://schemas.openxmlformats.org/officeDocument/2006/relationships">
+<p:sld xmlns:a="http://schemas.openxmlformats.org/drawingml/2006/main" xmlns:r="http://schemas.openxmlformats.org/officeDocument/2006/relationships" xmlns:p="http://schemas.openxmlformats.org/presentationml/2006/main">
   <p:cSld>
     <p:bg>
       <p:bgPr>
@@ -4375,7 +5261,7 @@
               </a:defRPr>
             </a:pPr>
             <a:r>
-              <a:t>Dataset &amp; Labels</a:t>
+              <a:t>Project Objectives</a:t>
             </a:r>
           </a:p>
         </p:txBody>
@@ -4410,7 +5296,7 @@
               </a:defRPr>
             </a:pPr>
             <a:r>
-              <a:t>Output categories</a:t>
+              <a:t>What the system does</a:t>
             </a:r>
           </a:p>
         </p:txBody>
@@ -4486,7 +5372,7 @@
               <a:spcAft>
                 <a:spcPts val="1400"/>
               </a:spcAft>
-              <a:defRPr sz="1600">
+              <a:defRPr sz="1900">
                 <a:solidFill>
                   <a:srgbClr val="F4F7FF"/>
                 </a:solidFill>
@@ -4494,7 +5380,7 @@
               </a:defRPr>
             </a:pPr>
             <a:r>
-              <a:t>•  Colors: 11 labels — red, orange, yellow, green, cyan, blue, purple, pink, black, white, gray.</a:t>
+              <a:t>•  Accept an uploaded photo or live camera stream.</a:t>
             </a:r>
           </a:p>
           <a:p>
@@ -4502,7 +5388,7 @@
               <a:spcAft>
                 <a:spcPts val="1400"/>
               </a:spcAft>
-              <a:defRPr sz="1600">
+              <a:defRPr sz="1900">
                 <a:solidFill>
                   <a:srgbClr val="F4F7FF"/>
                 </a:solidFill>
@@ -4510,7 +5396,7 @@
               </a:defRPr>
             </a:pPr>
             <a:r>
-              <a:t>•  Brightness: dark, medium, bright.</a:t>
+              <a:t>•  Run a trained model locally in the browser.</a:t>
             </a:r>
           </a:p>
           <a:p>
@@ -4518,7 +5404,7 @@
               <a:spcAft>
                 <a:spcPts val="1400"/>
               </a:spcAft>
-              <a:defRPr sz="1600">
+              <a:defRPr sz="1900">
                 <a:solidFill>
                   <a:srgbClr val="F4F7FF"/>
                 </a:solidFill>
@@ -4526,7 +5412,7 @@
               </a:defRPr>
             </a:pPr>
             <a:r>
-              <a:t>•  Temperature tone: cool, neutral, warm.</a:t>
+              <a:t>•  Predict color, brightness, temperature-tone and weather categories.</a:t>
             </a:r>
           </a:p>
           <a:p>
@@ -4534,7 +5420,7 @@
               <a:spcAft>
                 <a:spcPts val="1400"/>
               </a:spcAft>
-              <a:defRPr sz="1600">
+              <a:defRPr sz="1900">
                 <a:solidFill>
                   <a:srgbClr val="F4F7FF"/>
                 </a:solidFill>
@@ -4542,23 +5428,7 @@
               </a:defRPr>
             </a:pPr>
             <a:r>
-              <a:t>•  Weather: cloudy, foggy, other, rainy, shine, sunrise.</a:t>
-            </a:r>
-          </a:p>
-          <a:p>
-            <a:pPr>
-              <a:spcAft>
-                <a:spcPts val="1400"/>
-              </a:spcAft>
-              <a:defRPr sz="1600">
-                <a:solidFill>
-                  <a:srgbClr val="F4F7FF"/>
-                </a:solidFill>
-                <a:latin typeface="Aptos"/>
-              </a:defRPr>
-            </a:pPr>
-            <a:r>
-              <a:t>•  Dataset URL and sample counts must be filled from the exact training source.</a:t>
+              <a:t>•  Show a responsive dashboard with confidence-style outputs and color bars.</a:t>
             </a:r>
           </a:p>
         </p:txBody>
@@ -4593,7 +5463,7 @@
               </a:defRPr>
             </a:pPr>
             <a:r>
-              <a:t>ATMOS AI  •  Deep Learning Semester Project                                      04 / 10</a:t>
+              <a:t>ATMOS AI  •  Deep Learning Semester Project                                      03 / 10</a:t>
             </a:r>
           </a:p>
         </p:txBody>
@@ -4607,7 +5477,7 @@
 </file>
 
 <file path=ppt/slides/slide5.xml><?xml version="1.0" encoding="utf-8"?>
-<p:sld xmlns:a="http://schemas.openxmlformats.org/drawingml/2006/main" xmlns:p="http://schemas.openxmlformats.org/presentationml/2006/main" xmlns:r="http://schemas.openxmlformats.org/officeDocument/2006/relationships">
+<p:sld xmlns:a="http://schemas.openxmlformats.org/drawingml/2006/main" xmlns:r="http://schemas.openxmlformats.org/officeDocument/2006/relationships" xmlns:p="http://schemas.openxmlformats.org/presentationml/2006/main">
   <p:cSld>
     <p:bg>
       <p:bgPr>
@@ -4698,7 +5568,7 @@
               </a:defRPr>
             </a:pPr>
             <a:r>
-              <a:t>Model Architecture</a:t>
+              <a:t>Dataset &amp; Labels</a:t>
             </a:r>
           </a:p>
         </p:txBody>
@@ -4733,7 +5603,7 @@
               </a:defRPr>
             </a:pPr>
             <a:r>
-              <a:t>Multi-output MobileNetV2</a:t>
+              <a:t>Output categories</a:t>
             </a:r>
           </a:p>
         </p:txBody>
@@ -4817,7 +5687,7 @@
               </a:defRPr>
             </a:pPr>
             <a:r>
-              <a:t>•  Input tensor: 224 × 224 × 3.</a:t>
+              <a:t>•  Colors: 11 labels — red, orange, yellow, green, cyan, blue, purple, pink, black, white, gray.</a:t>
             </a:r>
           </a:p>
           <a:p>
@@ -4833,7 +5703,7 @@
               </a:defRPr>
             </a:pPr>
             <a:r>
-              <a:t>•  MobileNetV2 feature extractor.</a:t>
+              <a:t>•  Brightness: dark, medium, bright.</a:t>
             </a:r>
           </a:p>
           <a:p>
@@ -4849,7 +5719,7 @@
               </a:defRPr>
             </a:pPr>
             <a:r>
-              <a:t>•  Shared dense layer: 256 units, ReLU.</a:t>
+              <a:t>•  Temperature tone: cool, neutral, warm.</a:t>
             </a:r>
           </a:p>
           <a:p>
@@ -4865,7 +5735,7 @@
               </a:defRPr>
             </a:pPr>
             <a:r>
-              <a:t>•  Four softmax heads: 11 color, 3 brightness, 3 temperature, 6 weather outputs.</a:t>
+              <a:t>•  Weather: cloudy, foggy, other, rainy, shine, sunrise.</a:t>
             </a:r>
           </a:p>
           <a:p>
@@ -4881,7 +5751,7 @@
               </a:defRPr>
             </a:pPr>
             <a:r>
-              <a:t>•  TensorFlow.js model JSON + three weight shards.</a:t>
+              <a:t>•  Dataset URL and sample counts must be filled from the exact training source.</a:t>
             </a:r>
           </a:p>
         </p:txBody>
@@ -4916,7 +5786,7 @@
               </a:defRPr>
             </a:pPr>
             <a:r>
-              <a:t>ATMOS AI  •  Deep Learning Semester Project                                      05 / 10</a:t>
+              <a:t>ATMOS AI  •  Deep Learning Semester Project                                      04 / 10</a:t>
             </a:r>
           </a:p>
         </p:txBody>
@@ -4930,7 +5800,7 @@
 </file>
 
 <file path=ppt/slides/slide6.xml><?xml version="1.0" encoding="utf-8"?>
-<p:sld xmlns:a="http://schemas.openxmlformats.org/drawingml/2006/main" xmlns:p="http://schemas.openxmlformats.org/presentationml/2006/main" xmlns:r="http://schemas.openxmlformats.org/officeDocument/2006/relationships">
+<p:sld xmlns:a="http://schemas.openxmlformats.org/drawingml/2006/main" xmlns:r="http://schemas.openxmlformats.org/officeDocument/2006/relationships" xmlns:p="http://schemas.openxmlformats.org/presentationml/2006/main">
   <p:cSld>
     <p:bg>
       <p:bgPr>
@@ -5021,7 +5891,7 @@
               </a:defRPr>
             </a:pPr>
             <a:r>
-              <a:t>Application Workflow</a:t>
+              <a:t>Model Architecture</a:t>
             </a:r>
           </a:p>
         </p:txBody>
@@ -5056,7 +5926,7 @@
               </a:defRPr>
             </a:pPr>
             <a:r>
-              <a:t>From camera to dashboard</a:t>
+              <a:t>Multi-output MobileNetV2</a:t>
             </a:r>
           </a:p>
         </p:txBody>
@@ -5140,7 +6010,7 @@
               </a:defRPr>
             </a:pPr>
             <a:r>
-              <a:t>•  1. Select photo or enable camera.</a:t>
+              <a:t>•  Input tensor: 224 × 224 × 3.</a:t>
             </a:r>
           </a:p>
           <a:p>
@@ -5156,7 +6026,7 @@
               </a:defRPr>
             </a:pPr>
             <a:r>
-              <a:t>•  2. Resize and normalize the frame.</a:t>
+              <a:t>•  MobileNetV2 feature extractor.</a:t>
             </a:r>
           </a:p>
           <a:p>
@@ -5172,7 +6042,7 @@
               </a:defRPr>
             </a:pPr>
             <a:r>
-              <a:t>•  3. Run TensorFlow.js inference in browser.</a:t>
+              <a:t>•  Shared dense layer: 256 units, ReLU.</a:t>
             </a:r>
           </a:p>
           <a:p>
@@ -5188,7 +6058,7 @@
               </a:defRPr>
             </a:pPr>
             <a:r>
-              <a:t>•  4. Display prediction vectors and color composition.</a:t>
+              <a:t>•  Four softmax heads: 11 color, 3 brightness, 3 temperature, 6 weather outputs.</a:t>
             </a:r>
           </a:p>
           <a:p>
@@ -5204,7 +6074,7 @@
               </a:defRPr>
             </a:pPr>
             <a:r>
-              <a:t>•  5. Apply simple pixel cues for night/sky-related presentation.</a:t>
+              <a:t>•  TensorFlow.js model JSON + three weight shards.</a:t>
             </a:r>
           </a:p>
         </p:txBody>
@@ -5239,7 +6109,7 @@
               </a:defRPr>
             </a:pPr>
             <a:r>
-              <a:t>ATMOS AI  •  Deep Learning Semester Project                                      06 / 10</a:t>
+              <a:t>ATMOS AI  •  Deep Learning Semester Project                                      05 / 10</a:t>
             </a:r>
           </a:p>
         </p:txBody>
@@ -5253,7 +6123,7 @@
 </file>
 
 <file path=ppt/slides/slide7.xml><?xml version="1.0" encoding="utf-8"?>
-<p:sld xmlns:a="http://schemas.openxmlformats.org/drawingml/2006/main" xmlns:p="http://schemas.openxmlformats.org/presentationml/2006/main" xmlns:r="http://schemas.openxmlformats.org/officeDocument/2006/relationships">
+<p:sld xmlns:a="http://schemas.openxmlformats.org/drawingml/2006/main" xmlns:r="http://schemas.openxmlformats.org/officeDocument/2006/relationships" xmlns:p="http://schemas.openxmlformats.org/presentationml/2006/main">
   <p:cSld>
     <p:bg>
       <p:bgPr>
@@ -5344,7 +6214,7 @@
               </a:defRPr>
             </a:pPr>
             <a:r>
-              <a:t>Technology Stack</a:t>
+              <a:t>Application Workflow</a:t>
             </a:r>
           </a:p>
         </p:txBody>
@@ -5379,7 +6249,7 @@
               </a:defRPr>
             </a:pPr>
             <a:r>
-              <a:t>Tools and components</a:t>
+              <a:t>From camera to dashboard</a:t>
             </a:r>
           </a:p>
         </p:txBody>
@@ -5463,7 +6333,7 @@
               </a:defRPr>
             </a:pPr>
             <a:r>
-              <a:t>•  HTML, CSS and JavaScript</a:t>
+              <a:t>•  1. Select photo or enable camera.</a:t>
             </a:r>
           </a:p>
           <a:p>
@@ -5479,7 +6349,7 @@
               </a:defRPr>
             </a:pPr>
             <a:r>
-              <a:t>•  TensorFlow.js 4.22.0</a:t>
+              <a:t>•  2. Resize and normalize the frame.</a:t>
             </a:r>
           </a:p>
           <a:p>
@@ -5495,7 +6365,7 @@
               </a:defRPr>
             </a:pPr>
             <a:r>
-              <a:t>•  MobileNetV2-based LayersModel</a:t>
+              <a:t>•  3. Run TensorFlow.js inference in browser.</a:t>
             </a:r>
           </a:p>
           <a:p>
@@ -5511,7 +6381,7 @@
               </a:defRPr>
             </a:pPr>
             <a:r>
-              <a:t>•  Browser camera API: getUserMedia</a:t>
+              <a:t>•  4. Display prediction vectors and color composition.</a:t>
             </a:r>
           </a:p>
           <a:p>
@@ -5527,7 +6397,7 @@
               </a:defRPr>
             </a:pPr>
             <a:r>
-              <a:t>•  Vercel static hosting target</a:t>
+              <a:t>•  5. Apply simple pixel cues for night/sky-related presentation.</a:t>
             </a:r>
           </a:p>
         </p:txBody>
@@ -5562,7 +6432,7 @@
               </a:defRPr>
             </a:pPr>
             <a:r>
-              <a:t>ATMOS AI  •  Deep Learning Semester Project                                      07 / 10</a:t>
+              <a:t>ATMOS AI  •  Deep Learning Semester Project                                      06 / 10</a:t>
             </a:r>
           </a:p>
         </p:txBody>
@@ -5576,7 +6446,7 @@
 </file>
 
 <file path=ppt/slides/slide8.xml><?xml version="1.0" encoding="utf-8"?>
-<p:sld xmlns:a="http://schemas.openxmlformats.org/drawingml/2006/main" xmlns:p="http://schemas.openxmlformats.org/presentationml/2006/main" xmlns:r="http://schemas.openxmlformats.org/officeDocument/2006/relationships">
+<p:sld xmlns:a="http://schemas.openxmlformats.org/drawingml/2006/main" xmlns:r="http://schemas.openxmlformats.org/officeDocument/2006/relationships" xmlns:p="http://schemas.openxmlformats.org/presentationml/2006/main">
   <p:cSld>
     <p:bg>
       <p:bgPr>
@@ -5667,7 +6537,7 @@
               </a:defRPr>
             </a:pPr>
             <a:r>
-              <a:t>Results &amp; Evaluation</a:t>
+              <a:t>Technology Stack</a:t>
             </a:r>
           </a:p>
         </p:txBody>
@@ -5702,7 +6572,7 @@
               </a:defRPr>
             </a:pPr>
             <a:r>
-              <a:t>What is verified</a:t>
+              <a:t>Tools and components</a:t>
             </a:r>
           </a:p>
         </p:txBody>
@@ -5778,7 +6648,7 @@
               <a:spcAft>
                 <a:spcPts val="1400"/>
               </a:spcAft>
-              <a:defRPr sz="1900">
+              <a:defRPr sz="1600">
                 <a:solidFill>
                   <a:srgbClr val="F4F7FF"/>
                 </a:solidFill>
@@ -5786,7 +6656,7 @@
               </a:defRPr>
             </a:pPr>
             <a:r>
-              <a:t>•  Model config confirms input and four output dimensions.</a:t>
+              <a:t>•  HTML, CSS and JavaScript</a:t>
             </a:r>
           </a:p>
           <a:p>
@@ -5794,7 +6664,7 @@
               <a:spcAft>
                 <a:spcPts val="1400"/>
               </a:spcAft>
-              <a:defRPr sz="1900">
+              <a:defRPr sz="1600">
                 <a:solidFill>
                   <a:srgbClr val="F4F7FF"/>
                 </a:solidFill>
@@ -5802,7 +6672,7 @@
               </a:defRPr>
             </a:pPr>
             <a:r>
-              <a:t>•  Application code includes upload, camera, inference and visual color bars.</a:t>
+              <a:t>•  TensorFlow.js 4.22.0</a:t>
             </a:r>
           </a:p>
           <a:p>
@@ -5810,7 +6680,7 @@
               <a:spcAft>
                 <a:spcPts val="1400"/>
               </a:spcAft>
-              <a:defRPr sz="1900">
+              <a:defRPr sz="1600">
                 <a:solidFill>
                   <a:srgbClr val="F4F7FF"/>
                 </a:solidFill>
@@ -5818,7 +6688,7 @@
               </a:defRPr>
             </a:pPr>
             <a:r>
-              <a:t>•  No verified held-out accuracy or per-class metrics were included in the supplied files.</a:t>
+              <a:t>•  MobileNetV2-based LayersModel</a:t>
             </a:r>
           </a:p>
           <a:p>
@@ -5826,7 +6696,7 @@
               <a:spcAft>
                 <a:spcPts val="1400"/>
               </a:spcAft>
-              <a:defRPr sz="1900">
+              <a:defRPr sz="1600">
                 <a:solidFill>
                   <a:srgbClr val="F4F7FF"/>
                 </a:solidFill>
@@ -5834,7 +6704,23 @@
               </a:defRPr>
             </a:pPr>
             <a:r>
-              <a:t>•  Evaluate on a held-out test set and report real metrics; do not guess.</a:t>
+              <a:t>•  Browser camera API: getUserMedia</a:t>
+            </a:r>
+          </a:p>
+          <a:p>
+            <a:pPr>
+              <a:spcAft>
+                <a:spcPts val="1400"/>
+              </a:spcAft>
+              <a:defRPr sz="1600">
+                <a:solidFill>
+                  <a:srgbClr val="F4F7FF"/>
+                </a:solidFill>
+                <a:latin typeface="Aptos"/>
+              </a:defRPr>
+            </a:pPr>
+            <a:r>
+              <a:t>•  Vercel static hosting target</a:t>
             </a:r>
           </a:p>
         </p:txBody>
@@ -5869,7 +6755,7 @@
               </a:defRPr>
             </a:pPr>
             <a:r>
-              <a:t>ATMOS AI  •  Deep Learning Semester Project                                      08 / 10</a:t>
+              <a:t>ATMOS AI  •  Deep Learning Semester Project                                      07 / 10</a:t>
             </a:r>
           </a:p>
         </p:txBody>
@@ -5883,7 +6769,7 @@
 </file>
 
 <file path=ppt/slides/slide9.xml><?xml version="1.0" encoding="utf-8"?>
-<p:sld xmlns:a="http://schemas.openxmlformats.org/drawingml/2006/main" xmlns:p="http://schemas.openxmlformats.org/presentationml/2006/main" xmlns:r="http://schemas.openxmlformats.org/officeDocument/2006/relationships">
+<p:sld xmlns:a="http://schemas.openxmlformats.org/drawingml/2006/main" xmlns:r="http://schemas.openxmlformats.org/officeDocument/2006/relationships" xmlns:p="http://schemas.openxmlformats.org/presentationml/2006/main">
   <p:cSld>
     <p:bg>
       <p:bgPr>
@@ -5974,7 +6860,7 @@
               </a:defRPr>
             </a:pPr>
             <a:r>
-              <a:t>Limitations &amp; Future Work</a:t>
+              <a:t>Results &amp; Evaluation</a:t>
             </a:r>
           </a:p>
         </p:txBody>
@@ -6009,7 +6895,7 @@
               </a:defRPr>
             </a:pPr>
             <a:r>
-              <a:t>What to improve next</a:t>
+              <a:t>What is verified</a:t>
             </a:r>
           </a:p>
         </p:txBody>
@@ -6085,7 +6971,7 @@
               <a:spcAft>
                 <a:spcPts val="1400"/>
               </a:spcAft>
-              <a:defRPr sz="1600">
+              <a:defRPr sz="1900">
                 <a:solidFill>
                   <a:srgbClr val="F4F7FF"/>
                 </a:solidFill>
@@ -6093,7 +6979,7 @@
               </a:defRPr>
             </a:pPr>
             <a:r>
-              <a:t>•  Verify dataset source, license, image counts and split strategy.</a:t>
+              <a:t>•  Model config confirms input and four output dimensions.</a:t>
             </a:r>
           </a:p>
           <a:p>
@@ -6101,7 +6987,7 @@
               <a:spcAft>
                 <a:spcPts val="1400"/>
               </a:spcAft>
-              <a:defRPr sz="1600">
+              <a:defRPr sz="1900">
                 <a:solidFill>
                   <a:srgbClr val="F4F7FF"/>
                 </a:solidFill>
@@ -6109,7 +6995,7 @@
               </a:defRPr>
             </a:pPr>
             <a:r>
-              <a:t>•  Measure metrics separately for each output head.</a:t>
+              <a:t>•  Application code includes upload, camera, inference and visual color bars.</a:t>
             </a:r>
           </a:p>
           <a:p>
@@ -6117,7 +7003,7 @@
               <a:spcAft>
                 <a:spcPts val="1400"/>
               </a:spcAft>
-              <a:defRPr sz="1600">
+              <a:defRPr sz="1900">
                 <a:solidFill>
                   <a:srgbClr val="F4F7FF"/>
                 </a:solidFill>
@@ -6125,7 +7011,7 @@
               </a:defRPr>
             </a:pPr>
             <a:r>
-              <a:t>•  Validate weather heuristic against varied indoor/outdoor scenes.</a:t>
+              <a:t>•  No verified held-out accuracy or per-class metrics were included in the supplied files.</a:t>
             </a:r>
           </a:p>
           <a:p>
@@ -6133,7 +7019,7 @@
               <a:spcAft>
                 <a:spcPts val="1400"/>
               </a:spcAft>
-              <a:defRPr sz="1600">
+              <a:defRPr sz="1900">
                 <a:solidFill>
                   <a:srgbClr val="F4F7FF"/>
                 </a:solidFill>
@@ -6141,23 +7027,7 @@
               </a:defRPr>
             </a:pPr>
             <a:r>
-              <a:t>•  Improve accessibility and mobile-browser testing.</a:t>
-            </a:r>
-          </a:p>
-          <a:p>
-            <a:pPr>
-              <a:spcAft>
-                <a:spcPts val="1400"/>
-              </a:spcAft>
-              <a:defRPr sz="1600">
-                <a:solidFill>
-                  <a:srgbClr val="F4F7FF"/>
-                </a:solidFill>
-                <a:latin typeface="Aptos"/>
-              </a:defRPr>
-            </a:pPr>
-            <a:r>
-              <a:t>•  Add examples of correct and incorrect predictions.</a:t>
+              <a:t>•  Evaluate on a held-out test set and report real metrics; do not guess.</a:t>
             </a:r>
           </a:p>
         </p:txBody>
@@ -6192,7 +7062,7 @@
               </a:defRPr>
             </a:pPr>
             <a:r>
-              <a:t>ATMOS AI  •  Deep Learning Semester Project                                      09 / 10</a:t>
+              <a:t>ATMOS AI  •  Deep Learning Semester Project                                      08 / 10</a:t>
             </a:r>
           </a:p>
         </p:txBody>
@@ -6203,6 +7073,423 @@
     <a:masterClrMapping/>
   </p:clrMapOvr>
 </p:sld>
+</file>
+
+<file path=ppt/tags/tag1.xml><?xml version="1.0" encoding="utf-8"?>
+<p:tagLst xmlns:p="http://schemas.openxmlformats.org/presentationml/2006/main">
+  <p:tag name="KSO_WM_UNIT_HIGHLIGHT" val="0"/>
+  <p:tag name="KSO_WM_UNIT_COMPATIBLE" val="0"/>
+  <p:tag name="KSO_WM_UNIT_DIAGRAM_ISNUMVISUAL" val="0"/>
+  <p:tag name="KSO_WM_UNIT_DIAGRAM_ISREFERUNIT" val="0"/>
+  <p:tag name="KSO_WM_UNIT_ID" val="_1**"/>
+  <p:tag name="KSO_WM_UNIT_LAYERLEVEL" val="1"/>
+  <p:tag name="KSO_WM_TAG_VERSION" val="3.0"/>
+  <p:tag name="KSO_WM_BEAUTIFY_FLAG" val="#wm#"/>
+</p:tagLst>
+</file>
+
+<file path=ppt/tags/tag10.xml><?xml version="1.0" encoding="utf-8"?>
+<p:tagLst xmlns:p="http://schemas.openxmlformats.org/presentationml/2006/main">
+  <p:tag name="KSO_WM_DIAGRAM_VERSION" val="3"/>
+  <p:tag name="KSO_WM_DIAGRAM_COLOR_TRICK" val="1"/>
+  <p:tag name="KSO_WM_DIAGRAM_COLOR_TEXT_CAN_REMOVE" val="n"/>
+  <p:tag name="KSO_WM_UNIT_SUBTYPE" val="a"/>
+  <p:tag name="KSO_WM_UNIT_NOCLEAR" val="0"/>
+  <p:tag name="KSO_WM_UNIT_HIGHLIGHT" val="0"/>
+  <p:tag name="KSO_WM_UNIT_COMPATIBLE" val="0"/>
+  <p:tag name="KSO_WM_UNIT_DIAGRAM_ISNUMVISUAL" val="0"/>
+  <p:tag name="KSO_WM_UNIT_DIAGRAM_ISREFERUNIT" val="0"/>
+  <p:tag name="KSO_WM_DIAGRAM_GROUP_CODE" val="l1-1"/>
+  <p:tag name="KSO_WM_UNIT_TYPE" val="l_h_f"/>
+  <p:tag name="KSO_WM_UNIT_INDEX" val="1_2_1"/>
+  <p:tag name="KSO_WM_UNIT_ID" val="diagram20232464_2*l_h_f*1_2_1"/>
+  <p:tag name="KSO_WM_TEMPLATE_CATEGORY" val="diagram"/>
+  <p:tag name="KSO_WM_TEMPLATE_INDEX" val="20232464"/>
+  <p:tag name="KSO_WM_UNIT_LAYERLEVEL" val="1_1_1"/>
+  <p:tag name="KSO_WM_TAG_VERSION" val="3.0"/>
+  <p:tag name="KSO_WM_BEAUTIFY_FLAG" val="#wm#"/>
+  <p:tag name="KSO_WM_DIAGRAM_MAX_ITEMCNT" val="5"/>
+  <p:tag name="KSO_WM_DIAGRAM_MIN_ITEMCNT" val="2"/>
+  <p:tag name="KSO_WM_DIAGRAM_VIRTUALLY_FRAME" val="{&quot;height&quot;:365.6000061035156,&quot;left&quot;:56.706174998846606,&quot;top&quot;:134.3020441923366,&quot;width&quot;:413.95001220703125}"/>
+  <p:tag name="KSO_WM_DIAGRAM_COLOR_MATCH_VALUE" val="{&quot;shape&quot;:{&quot;fill&quot;:{&quot;type&quot;:0},&quot;glow&quot;:{&quot;colorType&quot;:0},&quot;line&quot;:{&quot;type&quot;:0},&quot;shadow&quot;:{&quot;colorType&quot;:0},&quot;threeD&quot;:{&quot;curvedSurface&quot;:{&quot;brightness&quot;:0,&quot;colorType&quot;:2,&quot;rgb&quot;:&quot;#000000&quot;},&quot;depth&quot;:{&quot;colorType&quot;:0}}},&quot;text&quot;:{&quot;fill&quot;:{&quot;solid&quot;:{&quot;brightness&quot;:0.15000000596046448,&quot;colorType&quot;:1,&quot;foreColorIndex&quot;:13,&quot;transparency&quot;:0},&quot;type&quot;:1},&quot;glow&quot;:{&quot;colorType&quot;:0},&quot;line&quot;:{&quot;type&quot;:0},&quot;shadow&quot;:{&quot;colorType&quot;:0},&quot;threeD&quot;:{&quot;curvedSurface&quot;:{&quot;brightness&quot;:0,&quot;colorType&quot;:2,&quot;rgb&quot;:&quot;#000000&quot;},&quot;depth&quot;:{&quot;colorType&quot;:0}}}}"/>
+  <p:tag name="KSO_WM_UNIT_TEXT_FILL_FORE_SCHEMECOLOR_INDEX" val="1"/>
+  <p:tag name="KSO_WM_UNIT_TEXT_FILL_TYPE" val="1"/>
+  <p:tag name="KSO_WM_UNIT_PRESET_TEXT" val="Presentations are communication tools that can be used as demonstrations."/>
+  <p:tag name="KSO_WM_UNIT_USESOURCEFORMAT_APPLY" val="0"/>
+</p:tagLst>
+</file>
+
+<file path=ppt/tags/tag11.xml><?xml version="1.0" encoding="utf-8"?>
+<p:tagLst xmlns:p="http://schemas.openxmlformats.org/presentationml/2006/main">
+  <p:tag name="KSO_WM_DIAGRAM_VERSION" val="3"/>
+  <p:tag name="KSO_WM_DIAGRAM_COLOR_TRICK" val="1"/>
+  <p:tag name="KSO_WM_DIAGRAM_COLOR_TEXT_CAN_REMOVE" val="n"/>
+  <p:tag name="KSO_WM_UNIT_ISCONTENTSTITLE" val="0"/>
+  <p:tag name="KSO_WM_UNIT_ISNUMDGMTITLE" val="0"/>
+  <p:tag name="KSO_WM_UNIT_NOCLEAR" val="0"/>
+  <p:tag name="KSO_WM_UNIT_HIGHLIGHT" val="0"/>
+  <p:tag name="KSO_WM_UNIT_COMPATIBLE" val="0"/>
+  <p:tag name="KSO_WM_UNIT_DIAGRAM_ISNUMVISUAL" val="0"/>
+  <p:tag name="KSO_WM_UNIT_DIAGRAM_ISREFERUNIT" val="0"/>
+  <p:tag name="KSO_WM_DIAGRAM_GROUP_CODE" val="l1-1"/>
+  <p:tag name="KSO_WM_UNIT_TYPE" val="l_h_a"/>
+  <p:tag name="KSO_WM_UNIT_INDEX" val="1_2_1"/>
+  <p:tag name="KSO_WM_UNIT_ID" val="diagram20232464_2*l_h_a*1_2_1"/>
+  <p:tag name="KSO_WM_TEMPLATE_CATEGORY" val="diagram"/>
+  <p:tag name="KSO_WM_TEMPLATE_INDEX" val="20232464"/>
+  <p:tag name="KSO_WM_UNIT_LAYERLEVEL" val="1_1_1"/>
+  <p:tag name="KSO_WM_TAG_VERSION" val="3.0"/>
+  <p:tag name="KSO_WM_BEAUTIFY_FLAG" val="#wm#"/>
+  <p:tag name="KSO_WM_DIAGRAM_MAX_ITEMCNT" val="5"/>
+  <p:tag name="KSO_WM_DIAGRAM_MIN_ITEMCNT" val="2"/>
+  <p:tag name="KSO_WM_DIAGRAM_VIRTUALLY_FRAME" val="{&quot;height&quot;:365.6000061035156,&quot;left&quot;:56.706174998846606,&quot;top&quot;:134.3020441923366,&quot;width&quot;:413.95001220703125}"/>
+  <p:tag name="KSO_WM_DIAGRAM_COLOR_MATCH_VALUE" val="{&quot;shape&quot;:{&quot;fill&quot;:{&quot;type&quot;:0},&quot;glow&quot;:{&quot;colorType&quot;:0},&quot;line&quot;:{&quot;type&quot;:0},&quot;shadow&quot;:{&quot;colorType&quot;:0},&quot;threeD&quot;:{&quot;curvedSurface&quot;:{&quot;brightness&quot;:0,&quot;colorType&quot;:2,&quot;rgb&quot;:&quot;#000000&quot;},&quot;depth&quot;:{&quot;colorType&quot;:0}}},&quot;text&quot;:{&quot;fill&quot;:{&quot;solid&quot;:{&quot;brightness&quot;:0,&quot;colorType&quot;:1,&quot;foreColorIndex&quot;:13,&quot;transparency&quot;:0},&quot;type&quot;:1},&quot;glow&quot;:{&quot;colorType&quot;:0},&quot;line&quot;:{&quot;type&quot;:0},&quot;shadow&quot;:{&quot;colorType&quot;:0},&quot;threeD&quot;:{&quot;curvedSurface&quot;:{&quot;brightness&quot;:0,&quot;colorType&quot;:2,&quot;rgb&quot;:&quot;#000000&quot;},&quot;depth&quot;:{&quot;colorType&quot;:0}}}}"/>
+  <p:tag name="KSO_WM_UNIT_TEXT_FILL_FORE_SCHEMECOLOR_INDEX" val="1"/>
+  <p:tag name="KSO_WM_UNIT_TEXT_FILL_TYPE" val="1"/>
+  <p:tag name="KSO_WM_UNIT_PRESET_TEXT" val="Your title here"/>
+  <p:tag name="KSO_WM_UNIT_USESOURCEFORMAT_APPLY" val="0"/>
+</p:tagLst>
+</file>
+
+<file path=ppt/tags/tag12.xml><?xml version="1.0" encoding="utf-8"?>
+<p:tagLst xmlns:p="http://schemas.openxmlformats.org/presentationml/2006/main">
+  <p:tag name="KSO_WM_DIAGRAM_VERSION" val="3"/>
+  <p:tag name="KSO_WM_DIAGRAM_COLOR_TRICK" val="1"/>
+  <p:tag name="KSO_WM_DIAGRAM_COLOR_TEXT_CAN_REMOVE" val="n"/>
+  <p:tag name="KSO_WM_UNIT_HIGHLIGHT" val="0"/>
+  <p:tag name="KSO_WM_UNIT_COMPATIBLE" val="0"/>
+  <p:tag name="KSO_WM_UNIT_DIAGRAM_ISNUMVISUAL" val="0"/>
+  <p:tag name="KSO_WM_UNIT_DIAGRAM_ISREFERUNIT" val="0"/>
+  <p:tag name="KSO_WM_DIAGRAM_GROUP_CODE" val="l1-1"/>
+  <p:tag name="KSO_WM_UNIT_SUBTYPE" val="d"/>
+  <p:tag name="KSO_WM_UNIT_TYPE" val="l_h_i"/>
+  <p:tag name="KSO_WM_UNIT_INDEX" val="1_2_1"/>
+  <p:tag name="KSO_WM_UNIT_ID" val="diagram20232464_2*l_h_i*1_2_1"/>
+  <p:tag name="KSO_WM_TEMPLATE_CATEGORY" val="diagram"/>
+  <p:tag name="KSO_WM_TEMPLATE_INDEX" val="20232464"/>
+  <p:tag name="KSO_WM_UNIT_LAYERLEVEL" val="1_1_1"/>
+  <p:tag name="KSO_WM_TAG_VERSION" val="3.0"/>
+  <p:tag name="KSO_WM_BEAUTIFY_FLAG" val="#wm#"/>
+  <p:tag name="KSO_WM_DIAGRAM_MAX_ITEMCNT" val="5"/>
+  <p:tag name="KSO_WM_DIAGRAM_MIN_ITEMCNT" val="2"/>
+  <p:tag name="KSO_WM_DIAGRAM_VIRTUALLY_FRAME" val="{&quot;height&quot;:365.6000061035156,&quot;left&quot;:56.706174998846606,&quot;top&quot;:134.3020441923366,&quot;width&quot;:413.95001220703125}"/>
+  <p:tag name="KSO_WM_DIAGRAM_COLOR_MATCH_VALUE" val="{&quot;shape&quot;:{&quot;fill&quot;:{&quot;solid&quot;:{&quot;brightness&quot;:0,&quot;colorType&quot;:1,&quot;foreColorIndex&quot;:5,&quot;transparency&quot;:0},&quot;type&quot;:1},&quot;glow&quot;:{&quot;colorType&quot;:0},&quot;line&quot;:{&quot;type&quot;:0},&quot;shadow&quot;:{&quot;brightness&quot;:0,&quot;colorType&quot;:1,&quot;foreColorIndex&quot;:5,&quot;transparency&quot;:0.75},&quot;threeD&quot;:{&quot;curvedSurface&quot;:{&quot;brightness&quot;:0,&quot;colorType&quot;:2,&quot;rgb&quot;:&quot;#000000&quot;},&quot;depth&quot;:{&quot;colorType&quot;:0}}},&quot;text&quot;:{&quot;fill&quot;:{&quot;solid&quot;:{&quot;brightness&quot;:0,&quot;colorType&quot;:1,&quot;foreColorIndex&quot;:2,&quot;transparency&quot;:0},&quot;type&quot;:1},&quot;glow&quot;:{&quot;colorType&quot;:0},&quot;line&quot;:{&quot;type&quot;:0},&quot;shadow&quot;:{&quot;colorType&quot;:0},&quot;threeD&quot;:{&quot;curvedSurface&quot;:{&quot;brightness&quot;:0,&quot;colorType&quot;:2,&quot;rgb&quot;:&quot;#000000&quot;},&quot;depth&quot;:{&quot;colorType&quot;:0}}}}"/>
+  <p:tag name="KSO_WM_UNIT_FILL_TYPE" val="1"/>
+  <p:tag name="KSO_WM_UNIT_FILL_FORE_SCHEMECOLOR_INDEX" val="5"/>
+  <p:tag name="KSO_WM_UNIT_FILL_FORE_SCHEMECOLOR_INDEX_BRIGHTNESS" val="0"/>
+  <p:tag name="KSO_WM_UNIT_TEXT_FILL_FORE_SCHEMECOLOR_INDEX" val="1"/>
+  <p:tag name="KSO_WM_UNIT_TEXT_FILL_TYPE" val="1"/>
+  <p:tag name="KSO_WM_UNIT_PRESET_TEXT" val="02"/>
+  <p:tag name="KSO_WM_UNIT_SHADOW_SCHEMECOLOR_INDEX" val="5"/>
+  <p:tag name="KSO_WM_UNIT_USESOURCEFORMAT_APPLY" val="0"/>
+</p:tagLst>
+</file>
+
+<file path=ppt/tags/tag13.xml><?xml version="1.0" encoding="utf-8"?>
+<p:tagLst xmlns:p="http://schemas.openxmlformats.org/presentationml/2006/main">
+  <p:tag name="KSO_WM_DIAGRAM_VERSION" val="3"/>
+  <p:tag name="KSO_WM_DIAGRAM_COLOR_TRICK" val="1"/>
+  <p:tag name="KSO_WM_DIAGRAM_COLOR_TEXT_CAN_REMOVE" val="n"/>
+  <p:tag name="KSO_WM_UNIT_SUBTYPE" val="a"/>
+  <p:tag name="KSO_WM_UNIT_NOCLEAR" val="0"/>
+  <p:tag name="KSO_WM_UNIT_HIGHLIGHT" val="0"/>
+  <p:tag name="KSO_WM_UNIT_COMPATIBLE" val="0"/>
+  <p:tag name="KSO_WM_UNIT_DIAGRAM_ISNUMVISUAL" val="0"/>
+  <p:tag name="KSO_WM_UNIT_DIAGRAM_ISREFERUNIT" val="0"/>
+  <p:tag name="KSO_WM_DIAGRAM_GROUP_CODE" val="l1-1"/>
+  <p:tag name="KSO_WM_UNIT_TYPE" val="l_h_f"/>
+  <p:tag name="KSO_WM_UNIT_INDEX" val="1_3_1"/>
+  <p:tag name="KSO_WM_UNIT_ID" val="diagram20232464_2*l_h_f*1_3_1"/>
+  <p:tag name="KSO_WM_TEMPLATE_CATEGORY" val="diagram"/>
+  <p:tag name="KSO_WM_TEMPLATE_INDEX" val="20232464"/>
+  <p:tag name="KSO_WM_UNIT_LAYERLEVEL" val="1_1_1"/>
+  <p:tag name="KSO_WM_TAG_VERSION" val="3.0"/>
+  <p:tag name="KSO_WM_BEAUTIFY_FLAG" val="#wm#"/>
+  <p:tag name="KSO_WM_DIAGRAM_MAX_ITEMCNT" val="5"/>
+  <p:tag name="KSO_WM_DIAGRAM_MIN_ITEMCNT" val="2"/>
+  <p:tag name="KSO_WM_DIAGRAM_VIRTUALLY_FRAME" val="{&quot;height&quot;:365.6000061035156,&quot;left&quot;:56.706174998846606,&quot;top&quot;:134.3020441923366,&quot;width&quot;:413.95001220703125}"/>
+  <p:tag name="KSO_WM_DIAGRAM_COLOR_MATCH_VALUE" val="{&quot;shape&quot;:{&quot;fill&quot;:{&quot;type&quot;:0},&quot;glow&quot;:{&quot;colorType&quot;:0},&quot;line&quot;:{&quot;type&quot;:0},&quot;shadow&quot;:{&quot;colorType&quot;:0},&quot;threeD&quot;:{&quot;curvedSurface&quot;:{&quot;brightness&quot;:0,&quot;colorType&quot;:2,&quot;rgb&quot;:&quot;#000000&quot;},&quot;depth&quot;:{&quot;colorType&quot;:0}}},&quot;text&quot;:{&quot;fill&quot;:{&quot;solid&quot;:{&quot;brightness&quot;:0.15000000596046448,&quot;colorType&quot;:1,&quot;foreColorIndex&quot;:13,&quot;transparency&quot;:0},&quot;type&quot;:1},&quot;glow&quot;:{&quot;colorType&quot;:0},&quot;line&quot;:{&quot;type&quot;:0},&quot;shadow&quot;:{&quot;colorType&quot;:0},&quot;threeD&quot;:{&quot;curvedSurface&quot;:{&quot;brightness&quot;:0,&quot;colorType&quot;:2,&quot;rgb&quot;:&quot;#000000&quot;},&quot;depth&quot;:{&quot;colorType&quot;:0}}}}"/>
+  <p:tag name="KSO_WM_UNIT_TEXT_FILL_FORE_SCHEMECOLOR_INDEX" val="1"/>
+  <p:tag name="KSO_WM_UNIT_TEXT_FILL_TYPE" val="1"/>
+  <p:tag name="KSO_WM_UNIT_PRESET_TEXT" val="Presentations are communication tools that can be used as demonstrations."/>
+  <p:tag name="KSO_WM_UNIT_USESOURCEFORMAT_APPLY" val="0"/>
+</p:tagLst>
+</file>
+
+<file path=ppt/tags/tag14.xml><?xml version="1.0" encoding="utf-8"?>
+<p:tagLst xmlns:p="http://schemas.openxmlformats.org/presentationml/2006/main">
+  <p:tag name="KSO_WM_DIAGRAM_VERSION" val="3"/>
+  <p:tag name="KSO_WM_DIAGRAM_COLOR_TRICK" val="1"/>
+  <p:tag name="KSO_WM_DIAGRAM_COLOR_TEXT_CAN_REMOVE" val="n"/>
+  <p:tag name="KSO_WM_UNIT_ISCONTENTSTITLE" val="0"/>
+  <p:tag name="KSO_WM_UNIT_ISNUMDGMTITLE" val="0"/>
+  <p:tag name="KSO_WM_UNIT_NOCLEAR" val="0"/>
+  <p:tag name="KSO_WM_UNIT_HIGHLIGHT" val="0"/>
+  <p:tag name="KSO_WM_UNIT_COMPATIBLE" val="0"/>
+  <p:tag name="KSO_WM_UNIT_DIAGRAM_ISNUMVISUAL" val="0"/>
+  <p:tag name="KSO_WM_UNIT_DIAGRAM_ISREFERUNIT" val="0"/>
+  <p:tag name="KSO_WM_DIAGRAM_GROUP_CODE" val="l1-1"/>
+  <p:tag name="KSO_WM_UNIT_TYPE" val="l_h_a"/>
+  <p:tag name="KSO_WM_UNIT_INDEX" val="1_3_1"/>
+  <p:tag name="KSO_WM_UNIT_ID" val="diagram20232464_2*l_h_a*1_3_1"/>
+  <p:tag name="KSO_WM_TEMPLATE_CATEGORY" val="diagram"/>
+  <p:tag name="KSO_WM_TEMPLATE_INDEX" val="20232464"/>
+  <p:tag name="KSO_WM_UNIT_LAYERLEVEL" val="1_1_1"/>
+  <p:tag name="KSO_WM_TAG_VERSION" val="3.0"/>
+  <p:tag name="KSO_WM_BEAUTIFY_FLAG" val="#wm#"/>
+  <p:tag name="KSO_WM_DIAGRAM_MAX_ITEMCNT" val="5"/>
+  <p:tag name="KSO_WM_DIAGRAM_MIN_ITEMCNT" val="2"/>
+  <p:tag name="KSO_WM_DIAGRAM_VIRTUALLY_FRAME" val="{&quot;height&quot;:365.6000061035156,&quot;left&quot;:56.706174998846606,&quot;top&quot;:134.3020441923366,&quot;width&quot;:413.95001220703125}"/>
+  <p:tag name="KSO_WM_DIAGRAM_COLOR_MATCH_VALUE" val="{&quot;shape&quot;:{&quot;fill&quot;:{&quot;type&quot;:0},&quot;glow&quot;:{&quot;colorType&quot;:0},&quot;line&quot;:{&quot;type&quot;:0},&quot;shadow&quot;:{&quot;colorType&quot;:0},&quot;threeD&quot;:{&quot;curvedSurface&quot;:{&quot;brightness&quot;:0,&quot;colorType&quot;:2,&quot;rgb&quot;:&quot;#000000&quot;},&quot;depth&quot;:{&quot;colorType&quot;:0}}},&quot;text&quot;:{&quot;fill&quot;:{&quot;solid&quot;:{&quot;brightness&quot;:0,&quot;colorType&quot;:1,&quot;foreColorIndex&quot;:13,&quot;transparency&quot;:0},&quot;type&quot;:1},&quot;glow&quot;:{&quot;colorType&quot;:0},&quot;line&quot;:{&quot;type&quot;:0},&quot;shadow&quot;:{&quot;colorType&quot;:0},&quot;threeD&quot;:{&quot;curvedSurface&quot;:{&quot;brightness&quot;:0,&quot;colorType&quot;:2,&quot;rgb&quot;:&quot;#000000&quot;},&quot;depth&quot;:{&quot;colorType&quot;:0}}}}"/>
+  <p:tag name="KSO_WM_UNIT_TEXT_FILL_FORE_SCHEMECOLOR_INDEX" val="1"/>
+  <p:tag name="KSO_WM_UNIT_TEXT_FILL_TYPE" val="1"/>
+  <p:tag name="KSO_WM_UNIT_PRESET_TEXT" val="Your title here"/>
+  <p:tag name="KSO_WM_UNIT_USESOURCEFORMAT_APPLY" val="0"/>
+</p:tagLst>
+</file>
+
+<file path=ppt/tags/tag15.xml><?xml version="1.0" encoding="utf-8"?>
+<p:tagLst xmlns:p="http://schemas.openxmlformats.org/presentationml/2006/main">
+  <p:tag name="KSO_WM_DIAGRAM_VERSION" val="3"/>
+  <p:tag name="KSO_WM_DIAGRAM_COLOR_TRICK" val="1"/>
+  <p:tag name="KSO_WM_DIAGRAM_COLOR_TEXT_CAN_REMOVE" val="n"/>
+  <p:tag name="KSO_WM_UNIT_HIGHLIGHT" val="0"/>
+  <p:tag name="KSO_WM_UNIT_COMPATIBLE" val="0"/>
+  <p:tag name="KSO_WM_UNIT_DIAGRAM_ISNUMVISUAL" val="0"/>
+  <p:tag name="KSO_WM_UNIT_DIAGRAM_ISREFERUNIT" val="0"/>
+  <p:tag name="KSO_WM_DIAGRAM_GROUP_CODE" val="l1-1"/>
+  <p:tag name="KSO_WM_UNIT_SUBTYPE" val="d"/>
+  <p:tag name="KSO_WM_UNIT_TYPE" val="l_h_i"/>
+  <p:tag name="KSO_WM_UNIT_INDEX" val="1_3_1"/>
+  <p:tag name="KSO_WM_UNIT_ID" val="diagram20232464_2*l_h_i*1_3_1"/>
+  <p:tag name="KSO_WM_TEMPLATE_CATEGORY" val="diagram"/>
+  <p:tag name="KSO_WM_TEMPLATE_INDEX" val="20232464"/>
+  <p:tag name="KSO_WM_UNIT_LAYERLEVEL" val="1_1_1"/>
+  <p:tag name="KSO_WM_TAG_VERSION" val="3.0"/>
+  <p:tag name="KSO_WM_BEAUTIFY_FLAG" val="#wm#"/>
+  <p:tag name="KSO_WM_DIAGRAM_MAX_ITEMCNT" val="5"/>
+  <p:tag name="KSO_WM_DIAGRAM_MIN_ITEMCNT" val="2"/>
+  <p:tag name="KSO_WM_DIAGRAM_VIRTUALLY_FRAME" val="{&quot;height&quot;:365.6000061035156,&quot;left&quot;:56.706174998846606,&quot;top&quot;:134.3020441923366,&quot;width&quot;:413.95001220703125}"/>
+  <p:tag name="KSO_WM_DIAGRAM_COLOR_MATCH_VALUE" val="{&quot;shape&quot;:{&quot;fill&quot;:{&quot;solid&quot;:{&quot;brightness&quot;:0,&quot;colorType&quot;:1,&quot;foreColorIndex&quot;:5,&quot;transparency&quot;:0},&quot;type&quot;:1},&quot;glow&quot;:{&quot;colorType&quot;:0},&quot;line&quot;:{&quot;type&quot;:0},&quot;shadow&quot;:{&quot;brightness&quot;:0,&quot;colorType&quot;:1,&quot;foreColorIndex&quot;:5,&quot;transparency&quot;:0.75},&quot;threeD&quot;:{&quot;curvedSurface&quot;:{&quot;brightness&quot;:0,&quot;colorType&quot;:2,&quot;rgb&quot;:&quot;#000000&quot;},&quot;depth&quot;:{&quot;colorType&quot;:0}}},&quot;text&quot;:{&quot;fill&quot;:{&quot;solid&quot;:{&quot;brightness&quot;:0,&quot;colorType&quot;:1,&quot;foreColorIndex&quot;:2,&quot;transparency&quot;:0},&quot;type&quot;:1},&quot;glow&quot;:{&quot;colorType&quot;:0},&quot;line&quot;:{&quot;type&quot;:0},&quot;shadow&quot;:{&quot;colorType&quot;:0},&quot;threeD&quot;:{&quot;curvedSurface&quot;:{&quot;brightness&quot;:0,&quot;colorType&quot;:2,&quot;rgb&quot;:&quot;#000000&quot;},&quot;depth&quot;:{&quot;colorType&quot;:0}}}}"/>
+  <p:tag name="KSO_WM_UNIT_FILL_TYPE" val="1"/>
+  <p:tag name="KSO_WM_UNIT_FILL_FORE_SCHEMECOLOR_INDEX" val="5"/>
+  <p:tag name="KSO_WM_UNIT_FILL_FORE_SCHEMECOLOR_INDEX_BRIGHTNESS" val="0"/>
+  <p:tag name="KSO_WM_UNIT_TEXT_FILL_FORE_SCHEMECOLOR_INDEX" val="1"/>
+  <p:tag name="KSO_WM_UNIT_TEXT_FILL_TYPE" val="1"/>
+  <p:tag name="KSO_WM_UNIT_PRESET_TEXT" val="03"/>
+  <p:tag name="KSO_WM_UNIT_SHADOW_SCHEMECOLOR_INDEX" val="5"/>
+  <p:tag name="KSO_WM_UNIT_USESOURCEFORMAT_APPLY" val="0"/>
+</p:tagLst>
+</file>
+
+<file path=ppt/tags/tag16.xml><?xml version="1.0" encoding="utf-8"?>
+<p:tagLst xmlns:p="http://schemas.openxmlformats.org/presentationml/2006/main">
+  <p:tag name="KSO_WM_TEMPLATE_MASTER_TYPE" val="0"/>
+  <p:tag name="KSO_WM_TEMPLATE_COLOR_TYPE" val="0"/>
+  <p:tag name="KSO_WM_BEAUTIFY_FLAG" val="#wm#"/>
+  <p:tag name="KSO_WM_TEMPLATE_CATEGORY" val="custom"/>
+  <p:tag name="KSO_WM_SLIDE_TYPE" val="text"/>
+  <p:tag name="KSO_WM_SLIDE_SUBTYPE" val="picTxt"/>
+  <p:tag name="KSO_WM_SLIDE_SIZE" val="413.95*360.315"/>
+  <p:tag name="KSO_WM_SLIDE_POSITION" val="56.7199*138.975"/>
+  <p:tag name="KSO_WM_SLIDE_LAYOUT" val="a_d_l"/>
+  <p:tag name="KSO_WM_SLIDE_LAYOUT_CNT" val="1_1_1"/>
+  <p:tag name="KSO_WM_SPECIAL_SOURCE" val="bdnull"/>
+  <p:tag name="KSO_WM_DIAGRAM_GROUP_CODE" val="l1-1"/>
+  <p:tag name="KSO_WM_SLIDE_DIAGTYPE" val="l"/>
+  <p:tag name="KSO_WM_TEMPLATE_INDEX" val="20232463"/>
+  <p:tag name="KSO_WM_TEMPLATE_SUBCATEGORY" val="0"/>
+  <p:tag name="KSO_WM_SLIDE_INDEX" val="1"/>
+  <p:tag name="KSO_WM_TAG_VERSION" val="3.0"/>
+  <p:tag name="KSO_WM_SLIDE_ID" val="custom20232463_1"/>
+  <p:tag name="KSO_WM_SLIDE_ITEM_CNT" val="3"/>
+</p:tagLst>
+</file>
+
+<file path=ppt/tags/tag2.xml><?xml version="1.0" encoding="utf-8"?>
+<p:tagLst xmlns:p="http://schemas.openxmlformats.org/presentationml/2006/main">
+  <p:tag name="KSO_WM_UNIT_HIGHLIGHT" val="0"/>
+  <p:tag name="KSO_WM_UNIT_COMPATIBLE" val="0"/>
+  <p:tag name="KSO_WM_UNIT_DIAGRAM_ISNUMVISUAL" val="0"/>
+  <p:tag name="KSO_WM_UNIT_DIAGRAM_ISREFERUNIT" val="0"/>
+  <p:tag name="KSO_WM_UNIT_ID" val="_1**"/>
+  <p:tag name="KSO_WM_UNIT_LAYERLEVEL" val="1"/>
+  <p:tag name="KSO_WM_TAG_VERSION" val="3.0"/>
+  <p:tag name="KSO_WM_BEAUTIFY_FLAG" val="#wm#"/>
+</p:tagLst>
+</file>
+
+<file path=ppt/tags/tag3.xml><?xml version="1.0" encoding="utf-8"?>
+<p:tagLst xmlns:p="http://schemas.openxmlformats.org/presentationml/2006/main">
+  <p:tag name="KSO_WM_UNIT_HIGHLIGHT" val="0"/>
+  <p:tag name="KSO_WM_UNIT_COMPATIBLE" val="0"/>
+  <p:tag name="KSO_WM_UNIT_DIAGRAM_ISNUMVISUAL" val="0"/>
+  <p:tag name="KSO_WM_UNIT_DIAGRAM_ISREFERUNIT" val="0"/>
+  <p:tag name="KSO_WM_UNIT_ID" val="_1**"/>
+  <p:tag name="KSO_WM_UNIT_LAYERLEVEL" val="1"/>
+  <p:tag name="KSO_WM_TAG_VERSION" val="3.0"/>
+  <p:tag name="KSO_WM_BEAUTIFY_FLAG" val="#wm#"/>
+</p:tagLst>
+</file>
+
+<file path=ppt/tags/tag4.xml><?xml version="1.0" encoding="utf-8"?>
+<p:tagLst xmlns:p="http://schemas.openxmlformats.org/presentationml/2006/main">
+  <p:tag name="KSO_WM_UNIT_HIGHLIGHT" val="0"/>
+  <p:tag name="KSO_WM_UNIT_COMPATIBLE" val="0"/>
+  <p:tag name="KSO_WM_UNIT_DIAGRAM_ISNUMVISUAL" val="0"/>
+  <p:tag name="KSO_WM_UNIT_DIAGRAM_ISREFERUNIT" val="0"/>
+  <p:tag name="KSO_WM_UNIT_ID" val="_1**"/>
+  <p:tag name="KSO_WM_UNIT_LAYERLEVEL" val="1"/>
+  <p:tag name="KSO_WM_TAG_VERSION" val="3.0"/>
+  <p:tag name="KSO_WM_BEAUTIFY_FLAG" val="#wm#"/>
+</p:tagLst>
+</file>
+
+<file path=ppt/tags/tag5.xml><?xml version="1.0" encoding="utf-8"?>
+<p:tagLst xmlns:p="http://schemas.openxmlformats.org/presentationml/2006/main">
+  <p:tag name="KSO_WM_UNIT_ISCONTENTSTITLE" val="0"/>
+  <p:tag name="KSO_WM_UNIT_ISNUMDGMTITLE" val="0"/>
+  <p:tag name="KSO_WM_UNIT_NOCLEAR" val="0"/>
+  <p:tag name="KSO_WM_UNIT_HIGHLIGHT" val="0"/>
+  <p:tag name="KSO_WM_UNIT_COMPATIBLE" val="0"/>
+  <p:tag name="KSO_WM_UNIT_DIAGRAM_ISNUMVISUAL" val="0"/>
+  <p:tag name="KSO_WM_UNIT_DIAGRAM_ISREFERUNIT" val="0"/>
+  <p:tag name="KSO_WM_DIAGRAM_GROUP_CODE" val="l1-1"/>
+  <p:tag name="KSO_WM_UNIT_TYPE" val="a"/>
+  <p:tag name="KSO_WM_UNIT_INDEX" val="1"/>
+  <p:tag name="KSO_WM_TEMPLATE_CATEGORY" val="custom"/>
+  <p:tag name="KSO_WM_UNIT_LAYERLEVEL" val="1"/>
+  <p:tag name="KSO_WM_TAG_VERSION" val="3.0"/>
+  <p:tag name="KSO_WM_BEAUTIFY_FLAG" val="#wm#"/>
+  <p:tag name="KSO_WM_UNIT_VALUE" val="26"/>
+  <p:tag name="KSO_WM_TEMPLATE_INDEX" val="20232463"/>
+  <p:tag name="KSO_WM_UNIT_ID" val="custom20232463_1*a*1"/>
+  <p:tag name="KSO_WM_UNIT_PRESET_TEXT" val="Your title here"/>
+  <p:tag name="KSO_WM_UNIT_TEXT_FILL_FORE_SCHEMECOLOR_INDEX" val="13"/>
+  <p:tag name="KSO_WM_UNIT_TEXT_FILL_TYPE" val="1"/>
+  <p:tag name="KSO_WM_UNIT_USESOURCEFORMAT_APPLY" val="0"/>
+</p:tagLst>
+</file>
+
+<file path=ppt/tags/tag6.xml><?xml version="1.0" encoding="utf-8"?>
+<p:tagLst xmlns:p="http://schemas.openxmlformats.org/presentationml/2006/main">
+  <p:tag name="KSO_WM_UNIT_VALUE" val="1904*1453"/>
+  <p:tag name="KSO_WM_UNIT_HIGHLIGHT" val="0"/>
+  <p:tag name="KSO_WM_UNIT_COMPATIBLE" val="0"/>
+  <p:tag name="KSO_WM_UNIT_DIAGRAM_ISNUMVISUAL" val="0"/>
+  <p:tag name="KSO_WM_UNIT_DIAGRAM_ISREFERUNIT" val="0"/>
+  <p:tag name="KSO_WM_UNIT_TYPE" val="d"/>
+  <p:tag name="KSO_WM_UNIT_INDEX" val="1"/>
+  <p:tag name="KSO_WM_UNIT_ID" val="custom20232463_1*d*1"/>
+  <p:tag name="KSO_WM_TEMPLATE_CATEGORY" val="custom"/>
+  <p:tag name="KSO_WM_TEMPLATE_INDEX" val="20232463"/>
+  <p:tag name="KSO_WM_UNIT_LAYERLEVEL" val="1"/>
+  <p:tag name="KSO_WM_TAG_VERSION" val="3.0"/>
+  <p:tag name="KSO_WM_BEAUTIFY_FLAG" val="#wm#"/>
+  <p:tag name="KSO_WM_DIAGRAM_GROUP_CODE" val="l1-1"/>
+  <p:tag name="KSO_WM_UNIT_LINE_FORE_SCHEMECOLOR_INDEX" val="13"/>
+  <p:tag name="KSO_WM_UNIT_LINE_FILL_TYPE" val="2"/>
+  <p:tag name="KSO_WM_UNIT_TEXT_FILL_FORE_SCHEMECOLOR_INDEX" val="2"/>
+  <p:tag name="KSO_WM_UNIT_TEXT_FILL_TYPE" val="1"/>
+  <p:tag name="KSO_WM_UNIT_USESOURCEFORMAT_APPLY" val="0"/>
+</p:tagLst>
+</file>
+
+<file path=ppt/tags/tag7.xml><?xml version="1.0" encoding="utf-8"?>
+<p:tagLst xmlns:p="http://schemas.openxmlformats.org/presentationml/2006/main">
+  <p:tag name="KSO_WM_DIAGRAM_VERSION" val="3"/>
+  <p:tag name="KSO_WM_DIAGRAM_COLOR_TRICK" val="1"/>
+  <p:tag name="KSO_WM_DIAGRAM_COLOR_TEXT_CAN_REMOVE" val="n"/>
+  <p:tag name="KSO_WM_UNIT_SUBTYPE" val="a"/>
+  <p:tag name="KSO_WM_UNIT_NOCLEAR" val="0"/>
+  <p:tag name="KSO_WM_UNIT_HIGHLIGHT" val="0"/>
+  <p:tag name="KSO_WM_UNIT_COMPATIBLE" val="0"/>
+  <p:tag name="KSO_WM_UNIT_DIAGRAM_ISNUMVISUAL" val="0"/>
+  <p:tag name="KSO_WM_UNIT_DIAGRAM_ISREFERUNIT" val="0"/>
+  <p:tag name="KSO_WM_DIAGRAM_GROUP_CODE" val="l1-1"/>
+  <p:tag name="KSO_WM_UNIT_TYPE" val="l_h_f"/>
+  <p:tag name="KSO_WM_UNIT_INDEX" val="1_1_1"/>
+  <p:tag name="KSO_WM_UNIT_ID" val="diagram20232464_2*l_h_f*1_1_1"/>
+  <p:tag name="KSO_WM_TEMPLATE_CATEGORY" val="diagram"/>
+  <p:tag name="KSO_WM_TEMPLATE_INDEX" val="20232464"/>
+  <p:tag name="KSO_WM_UNIT_LAYERLEVEL" val="1_1_1"/>
+  <p:tag name="KSO_WM_TAG_VERSION" val="3.0"/>
+  <p:tag name="KSO_WM_BEAUTIFY_FLAG" val="#wm#"/>
+  <p:tag name="KSO_WM_DIAGRAM_MAX_ITEMCNT" val="5"/>
+  <p:tag name="KSO_WM_DIAGRAM_MIN_ITEMCNT" val="2"/>
+  <p:tag name="KSO_WM_DIAGRAM_VIRTUALLY_FRAME" val="{&quot;height&quot;:365.6000061035156,&quot;left&quot;:56.706174998846606,&quot;top&quot;:134.3020441923366,&quot;width&quot;:413.95001220703125}"/>
+  <p:tag name="KSO_WM_DIAGRAM_COLOR_MATCH_VALUE" val="{&quot;shape&quot;:{&quot;fill&quot;:{&quot;type&quot;:0},&quot;glow&quot;:{&quot;colorType&quot;:0},&quot;line&quot;:{&quot;type&quot;:0},&quot;shadow&quot;:{&quot;colorType&quot;:0},&quot;threeD&quot;:{&quot;curvedSurface&quot;:{&quot;brightness&quot;:0,&quot;colorType&quot;:2,&quot;rgb&quot;:&quot;#000000&quot;},&quot;depth&quot;:{&quot;colorType&quot;:0}}},&quot;text&quot;:{&quot;fill&quot;:{&quot;solid&quot;:{&quot;brightness&quot;:0.15000000596046448,&quot;colorType&quot;:1,&quot;foreColorIndex&quot;:13,&quot;transparency&quot;:0},&quot;type&quot;:1},&quot;glow&quot;:{&quot;colorType&quot;:0},&quot;line&quot;:{&quot;type&quot;:0},&quot;shadow&quot;:{&quot;colorType&quot;:0},&quot;threeD&quot;:{&quot;curvedSurface&quot;:{&quot;brightness&quot;:0,&quot;colorType&quot;:2,&quot;rgb&quot;:&quot;#000000&quot;},&quot;depth&quot;:{&quot;colorType&quot;:0}}}}"/>
+  <p:tag name="KSO_WM_UNIT_TEXT_FILL_FORE_SCHEMECOLOR_INDEX" val="1"/>
+  <p:tag name="KSO_WM_UNIT_TEXT_FILL_TYPE" val="1"/>
+  <p:tag name="KSO_WM_UNIT_PRESET_TEXT" val="Presentations are communication tools that can be used as demonstrations."/>
+  <p:tag name="KSO_WM_UNIT_USESOURCEFORMAT_APPLY" val="0"/>
+</p:tagLst>
+</file>
+
+<file path=ppt/tags/tag8.xml><?xml version="1.0" encoding="utf-8"?>
+<p:tagLst xmlns:p="http://schemas.openxmlformats.org/presentationml/2006/main">
+  <p:tag name="KSO_WM_DIAGRAM_VERSION" val="3"/>
+  <p:tag name="KSO_WM_DIAGRAM_COLOR_TRICK" val="1"/>
+  <p:tag name="KSO_WM_DIAGRAM_COLOR_TEXT_CAN_REMOVE" val="n"/>
+  <p:tag name="KSO_WM_UNIT_ISCONTENTSTITLE" val="0"/>
+  <p:tag name="KSO_WM_UNIT_ISNUMDGMTITLE" val="0"/>
+  <p:tag name="KSO_WM_UNIT_NOCLEAR" val="0"/>
+  <p:tag name="KSO_WM_UNIT_HIGHLIGHT" val="0"/>
+  <p:tag name="KSO_WM_UNIT_COMPATIBLE" val="0"/>
+  <p:tag name="KSO_WM_UNIT_DIAGRAM_ISNUMVISUAL" val="0"/>
+  <p:tag name="KSO_WM_UNIT_DIAGRAM_ISREFERUNIT" val="0"/>
+  <p:tag name="KSO_WM_DIAGRAM_GROUP_CODE" val="l1-1"/>
+  <p:tag name="KSO_WM_UNIT_TYPE" val="l_h_a"/>
+  <p:tag name="KSO_WM_UNIT_INDEX" val="1_1_1"/>
+  <p:tag name="KSO_WM_UNIT_ID" val="diagram20232464_2*l_h_a*1_1_1"/>
+  <p:tag name="KSO_WM_TEMPLATE_CATEGORY" val="diagram"/>
+  <p:tag name="KSO_WM_TEMPLATE_INDEX" val="20232464"/>
+  <p:tag name="KSO_WM_UNIT_LAYERLEVEL" val="1_1_1"/>
+  <p:tag name="KSO_WM_TAG_VERSION" val="3.0"/>
+  <p:tag name="KSO_WM_BEAUTIFY_FLAG" val="#wm#"/>
+  <p:tag name="KSO_WM_DIAGRAM_MAX_ITEMCNT" val="5"/>
+  <p:tag name="KSO_WM_DIAGRAM_MIN_ITEMCNT" val="2"/>
+  <p:tag name="KSO_WM_DIAGRAM_VIRTUALLY_FRAME" val="{&quot;height&quot;:365.6000061035156,&quot;left&quot;:56.706174998846606,&quot;top&quot;:134.3020441923366,&quot;width&quot;:413.95001220703125}"/>
+  <p:tag name="KSO_WM_DIAGRAM_COLOR_MATCH_VALUE" val="{&quot;shape&quot;:{&quot;fill&quot;:{&quot;type&quot;:0},&quot;glow&quot;:{&quot;colorType&quot;:0},&quot;line&quot;:{&quot;type&quot;:0},&quot;shadow&quot;:{&quot;colorType&quot;:0},&quot;threeD&quot;:{&quot;curvedSurface&quot;:{&quot;brightness&quot;:0,&quot;colorType&quot;:2,&quot;rgb&quot;:&quot;#000000&quot;},&quot;depth&quot;:{&quot;colorType&quot;:0}}},&quot;text&quot;:{&quot;fill&quot;:{&quot;solid&quot;:{&quot;brightness&quot;:0,&quot;colorType&quot;:1,&quot;foreColorIndex&quot;:13,&quot;transparency&quot;:0},&quot;type&quot;:1},&quot;glow&quot;:{&quot;colorType&quot;:0},&quot;line&quot;:{&quot;type&quot;:0},&quot;shadow&quot;:{&quot;colorType&quot;:0},&quot;threeD&quot;:{&quot;curvedSurface&quot;:{&quot;brightness&quot;:0,&quot;colorType&quot;:2,&quot;rgb&quot;:&quot;#000000&quot;},&quot;depth&quot;:{&quot;colorType&quot;:0}}}}"/>
+  <p:tag name="KSO_WM_UNIT_TEXT_FILL_FORE_SCHEMECOLOR_INDEX" val="1"/>
+  <p:tag name="KSO_WM_UNIT_TEXT_FILL_TYPE" val="1"/>
+  <p:tag name="KSO_WM_UNIT_PRESET_TEXT" val="Your title here"/>
+  <p:tag name="KSO_WM_UNIT_USESOURCEFORMAT_APPLY" val="0"/>
+</p:tagLst>
+</file>
+
+<file path=ppt/tags/tag9.xml><?xml version="1.0" encoding="utf-8"?>
+<p:tagLst xmlns:p="http://schemas.openxmlformats.org/presentationml/2006/main">
+  <p:tag name="KSO_WM_DIAGRAM_VERSION" val="3"/>
+  <p:tag name="KSO_WM_DIAGRAM_COLOR_TRICK" val="1"/>
+  <p:tag name="KSO_WM_DIAGRAM_COLOR_TEXT_CAN_REMOVE" val="n"/>
+  <p:tag name="KSO_WM_UNIT_HIGHLIGHT" val="0"/>
+  <p:tag name="KSO_WM_UNIT_COMPATIBLE" val="0"/>
+  <p:tag name="KSO_WM_UNIT_DIAGRAM_ISNUMVISUAL" val="0"/>
+  <p:tag name="KSO_WM_UNIT_DIAGRAM_ISREFERUNIT" val="0"/>
+  <p:tag name="KSO_WM_DIAGRAM_GROUP_CODE" val="l1-1"/>
+  <p:tag name="KSO_WM_UNIT_SUBTYPE" val="d"/>
+  <p:tag name="KSO_WM_UNIT_TYPE" val="l_h_i"/>
+  <p:tag name="KSO_WM_UNIT_INDEX" val="1_1_1"/>
+  <p:tag name="KSO_WM_UNIT_ID" val="diagram20232464_2*l_h_i*1_1_1"/>
+  <p:tag name="KSO_WM_TEMPLATE_CATEGORY" val="diagram"/>
+  <p:tag name="KSO_WM_TEMPLATE_INDEX" val="20232464"/>
+  <p:tag name="KSO_WM_UNIT_LAYERLEVEL" val="1_1_1"/>
+  <p:tag name="KSO_WM_TAG_VERSION" val="3.0"/>
+  <p:tag name="KSO_WM_BEAUTIFY_FLAG" val="#wm#"/>
+  <p:tag name="KSO_WM_DIAGRAM_MAX_ITEMCNT" val="5"/>
+  <p:tag name="KSO_WM_DIAGRAM_MIN_ITEMCNT" val="2"/>
+  <p:tag name="KSO_WM_DIAGRAM_VIRTUALLY_FRAME" val="{&quot;height&quot;:365.6000061035156,&quot;left&quot;:56.706174998846606,&quot;top&quot;:134.3020441923366,&quot;width&quot;:413.95001220703125}"/>
+  <p:tag name="KSO_WM_DIAGRAM_COLOR_MATCH_VALUE" val="{&quot;shape&quot;:{&quot;fill&quot;:{&quot;solid&quot;:{&quot;brightness&quot;:0,&quot;colorType&quot;:1,&quot;foreColorIndex&quot;:5,&quot;transparency&quot;:0},&quot;type&quot;:1},&quot;glow&quot;:{&quot;colorType&quot;:0},&quot;line&quot;:{&quot;type&quot;:0},&quot;shadow&quot;:{&quot;brightness&quot;:0,&quot;colorType&quot;:1,&quot;foreColorIndex&quot;:5,&quot;transparency&quot;:0.75},&quot;threeD&quot;:{&quot;curvedSurface&quot;:{&quot;brightness&quot;:0,&quot;colorType&quot;:2,&quot;rgb&quot;:&quot;#000000&quot;},&quot;depth&quot;:{&quot;colorType&quot;:0}}},&quot;text&quot;:{&quot;fill&quot;:{&quot;solid&quot;:{&quot;brightness&quot;:0,&quot;colorType&quot;:1,&quot;foreColorIndex&quot;:2,&quot;transparency&quot;:0},&quot;type&quot;:1},&quot;glow&quot;:{&quot;colorType&quot;:0},&quot;line&quot;:{&quot;type&quot;:0},&quot;shadow&quot;:{&quot;colorType&quot;:0},&quot;threeD&quot;:{&quot;curvedSurface&quot;:{&quot;brightness&quot;:0,&quot;colorType&quot;:2,&quot;rgb&quot;:&quot;#000000&quot;},&quot;depth&quot;:{&quot;colorType&quot;:0}}}}"/>
+  <p:tag name="KSO_WM_UNIT_FILL_TYPE" val="1"/>
+  <p:tag name="KSO_WM_UNIT_FILL_FORE_SCHEMECOLOR_INDEX" val="5"/>
+  <p:tag name="KSO_WM_UNIT_FILL_FORE_SCHEMECOLOR_INDEX_BRIGHTNESS" val="0"/>
+  <p:tag name="KSO_WM_UNIT_TEXT_FILL_FORE_SCHEMECOLOR_INDEX" val="1"/>
+  <p:tag name="KSO_WM_UNIT_TEXT_FILL_TYPE" val="1"/>
+  <p:tag name="KSO_WM_UNIT_PRESET_TEXT" val="01"/>
+  <p:tag name="KSO_WM_UNIT_SHADOW_SCHEMECOLOR_INDEX" val="5"/>
+  <p:tag name="KSO_WM_UNIT_USESOURCEFORMAT_APPLY" val="0"/>
+</p:tagLst>
 </file>
 
 <file path=ppt/theme/theme1.xml><?xml version="1.0" encoding="utf-8"?>
@@ -6521,6 +7808,10 @@
       </a:style>
     </a:lnDef>
   </a:objectDefaults>
-  <a:extraClrSchemeLst/>
+  <a:extLst>
+    <a:ext uri="{05A4C25C-085E-4340-85A3-A5531E510DB2}">
+      <thm15:themeFamily xmlns:thm15="http://schemas.microsoft.com/office/thememl/2012/main" name="Office Theme" id="{62F939B6-93AF-4DB8-9C6B-D6C7DFDC589F}" vid="{4A3C46E8-61CC-4603-A589-7422A47A8E4A}"/>
+    </a:ext>
+  </a:extLst>
 </a:theme>
 </file>